--- a/Karmada OpenSSF Best Practices Silver.pptx
+++ b/Karmada OpenSSF Best Practices Silver.pptx
@@ -128,7 +128,7 @@
   <p:extLst>
     <p:ext uri="{EFAFB233-063F-42B5-8137-9DF3F51BA10A}">
       <p15:sldGuideLst xmlns:p15="http://schemas.microsoft.com/office/powerpoint/2012/main">
-        <p15:guide id="1" orient="horz" pos="2044" userDrawn="1">
+        <p15:guide id="1" orient="horz" pos="2043" userDrawn="1">
           <p15:clr>
             <a:srgbClr val="A4A3A4"/>
           </p15:clr>
@@ -3218,19 +3218,34 @@
             </a:pPr>
             <a:r>
               <a:rPr lang="en-US" altLang="zh-CN" sz="1200">
+                <a:solidFill>
+                  <a:srgbClr val="00B0F0"/>
+                </a:solidFill>
                 <a:sym typeface="+mn-ea"/>
               </a:rPr>
               <a:t>Must </a:t>
             </a:r>
             <a:r>
-              <a:rPr lang="zh-CN" altLang="en-US" sz="1200"/>
+              <a:rPr lang="zh-CN" altLang="en-US" sz="1200">
+                <a:solidFill>
+                  <a:srgbClr val="00B0F0"/>
+                </a:solidFill>
+              </a:rPr>
               <a:t>类别：对漏洞报告的报告者表示公开感谢，最近一年没有则填</a:t>
             </a:r>
             <a:r>
-              <a:rPr lang="en-US" altLang="zh-CN" sz="1200"/>
+              <a:rPr lang="en-US" altLang="zh-CN" sz="1200">
+                <a:solidFill>
+                  <a:srgbClr val="00B0F0"/>
+                </a:solidFill>
+              </a:rPr>
               <a:t>N/A</a:t>
             </a:r>
-            <a:endParaRPr lang="zh-CN" altLang="en-US" sz="1200"/>
+            <a:endParaRPr lang="zh-CN" altLang="en-US" sz="1200">
+              <a:solidFill>
+                <a:srgbClr val="00B0F0"/>
+              </a:solidFill>
+            </a:endParaRPr>
           </a:p>
           <a:p>
             <a:pPr marL="285750" indent="-285750">
@@ -3240,7 +3255,7 @@
             <a:r>
               <a:rPr lang="en-US" altLang="zh-CN" sz="1200">
                 <a:solidFill>
-                  <a:srgbClr val="FF0000"/>
+                  <a:srgbClr val="00B0F0"/>
                 </a:solidFill>
                 <a:sym typeface="+mn-ea"/>
               </a:rPr>
@@ -3249,7 +3264,7 @@
             <a:r>
               <a:rPr lang="zh-CN" altLang="en-US" sz="1200">
                 <a:solidFill>
-                  <a:srgbClr val="FF0000"/>
+                  <a:srgbClr val="00B0F0"/>
                 </a:solidFill>
                 <a:sym typeface="+mn-ea"/>
               </a:rPr>
@@ -3258,7 +3273,7 @@
             <a:r>
               <a:rPr lang="en-US" altLang="zh-CN" sz="1200">
                 <a:solidFill>
-                  <a:srgbClr val="FF0000"/>
+                  <a:srgbClr val="00B0F0"/>
                 </a:solidFill>
                 <a:sym typeface="+mn-ea"/>
               </a:rPr>
@@ -3267,7 +3282,7 @@
             <a:r>
               <a:rPr lang="zh-CN" altLang="en-US" sz="1200">
                 <a:solidFill>
-                  <a:srgbClr val="FF0000"/>
+                  <a:srgbClr val="00B0F0"/>
                 </a:solidFill>
                 <a:sym typeface="+mn-ea"/>
               </a:rPr>
@@ -3276,7 +3291,7 @@
             <a:r>
               <a:rPr lang="en-US" altLang="zh-CN" sz="1200">
                 <a:solidFill>
-                  <a:srgbClr val="FF0000"/>
+                  <a:srgbClr val="00B0F0"/>
                 </a:solidFill>
                 <a:sym typeface="+mn-ea"/>
               </a:rPr>
@@ -3285,7 +3300,7 @@
             <a:r>
               <a:rPr lang="zh-CN" altLang="en-US" sz="1200">
                 <a:solidFill>
-                  <a:srgbClr val="FF0000"/>
+                  <a:srgbClr val="00B0F0"/>
                 </a:solidFill>
                 <a:sym typeface="+mn-ea"/>
               </a:rPr>
@@ -3294,7 +3309,7 @@
             <a:r>
               <a:rPr lang="en-US" altLang="zh-CN" sz="1200">
                 <a:solidFill>
-                  <a:srgbClr val="FF0000"/>
+                  <a:srgbClr val="00B0F0"/>
                 </a:solidFill>
                 <a:sym typeface="+mn-ea"/>
               </a:rPr>
@@ -3303,7 +3318,7 @@
             <a:r>
               <a:rPr lang="zh-CN" altLang="en-US" sz="1200">
                 <a:solidFill>
-                  <a:srgbClr val="FF0000"/>
+                  <a:srgbClr val="00B0F0"/>
                 </a:solidFill>
                 <a:sym typeface="+mn-ea"/>
               </a:rPr>
@@ -3312,7 +3327,7 @@
             <a:r>
               <a:rPr lang="en-US" altLang="zh-CN" sz="1200">
                 <a:solidFill>
-                  <a:srgbClr val="FF0000"/>
+                  <a:srgbClr val="00B0F0"/>
                 </a:solidFill>
                 <a:sym typeface="+mn-ea"/>
               </a:rPr>
@@ -3321,7 +3336,7 @@
             <a:r>
               <a:rPr lang="zh-CN" altLang="en-US" sz="1200">
                 <a:solidFill>
-                  <a:srgbClr val="FF0000"/>
+                  <a:srgbClr val="00B0F0"/>
                 </a:solidFill>
                 <a:sym typeface="+mn-ea"/>
               </a:rPr>
@@ -3330,7 +3345,7 @@
             <a:r>
               <a:rPr lang="en-US" altLang="zh-CN" sz="1200">
                 <a:solidFill>
-                  <a:srgbClr val="FF0000"/>
+                  <a:srgbClr val="00B0F0"/>
                 </a:solidFill>
                 <a:sym typeface="+mn-ea"/>
               </a:rPr>
@@ -3338,7 +3353,7 @@
             </a:r>
             <a:endParaRPr lang="en-US" altLang="zh-CN" sz="1200">
               <a:solidFill>
-                <a:srgbClr val="FF0000"/>
+                <a:srgbClr val="00B0F0"/>
               </a:solidFill>
               <a:sym typeface="+mn-ea"/>
             </a:endParaRPr>
@@ -3372,23 +3387,34 @@
             </a:pPr>
             <a:r>
               <a:rPr lang="en-US" altLang="zh-CN" sz="1200">
+                <a:solidFill>
+                  <a:srgbClr val="00B0F0"/>
+                </a:solidFill>
                 <a:sym typeface="+mn-ea"/>
               </a:rPr>
               <a:t>Must</a:t>
             </a:r>
             <a:r>
-              <a:rPr lang="zh-CN" altLang="en-US" sz="1200"/>
-              <a:t>类别：要求项目有一个书面的流程相应报告</a:t>
-            </a:r>
-            <a:r>
-              <a:rPr lang="zh-CN" altLang="en-US" sz="1200"/>
-              <a:t>漏洞。</a:t>
-            </a:r>
-            <a:r>
-              <a:rPr lang="en-US" altLang="zh-CN" sz="1200"/>
+              <a:rPr lang="zh-CN" altLang="en-US" sz="1200">
+                <a:solidFill>
+                  <a:srgbClr val="00B0F0"/>
+                </a:solidFill>
+              </a:rPr>
+              <a:t>类别：要求项目有一个书面的流程相应报告漏洞。</a:t>
+            </a:r>
+            <a:r>
+              <a:rPr lang="en-US" altLang="zh-CN" sz="1200">
+                <a:solidFill>
+                  <a:srgbClr val="00B0F0"/>
+                </a:solidFill>
+              </a:rPr>
               <a:t>		</a:t>
             </a:r>
-            <a:endParaRPr lang="zh-CN" altLang="en-US" sz="1200"/>
+            <a:endParaRPr lang="zh-CN" altLang="en-US" sz="1200">
+              <a:solidFill>
+                <a:srgbClr val="00B0F0"/>
+              </a:solidFill>
+            </a:endParaRPr>
           </a:p>
           <a:p>
             <a:pPr marL="285750" indent="-285750">
@@ -3398,7 +3424,7 @@
             <a:r>
               <a:rPr lang="en-US" altLang="zh-CN" sz="1200">
                 <a:solidFill>
-                  <a:srgbClr val="FF0000"/>
+                  <a:srgbClr val="00B0F0"/>
                 </a:solidFill>
               </a:rPr>
               <a:t>Met</a:t>
@@ -3406,7 +3432,7 @@
             <a:r>
               <a:rPr lang="zh-CN" altLang="en-US" sz="1200">
                 <a:solidFill>
-                  <a:srgbClr val="FF0000"/>
+                  <a:srgbClr val="00B0F0"/>
                 </a:solidFill>
               </a:rPr>
               <a:t>：</a:t>
@@ -3414,7 +3440,7 @@
             <a:r>
               <a:rPr lang="en-US" altLang="zh-CN" sz="1200">
                 <a:solidFill>
-                  <a:srgbClr val="FF0000"/>
+                  <a:srgbClr val="00B0F0"/>
                 </a:solidFill>
               </a:rPr>
               <a:t> SECURITY.md </a:t>
@@ -3422,7 +3448,7 @@
             <a:r>
               <a:rPr lang="zh-CN" altLang="en-US" sz="1200">
                 <a:solidFill>
-                  <a:srgbClr val="FF0000"/>
+                  <a:srgbClr val="00B0F0"/>
                 </a:solidFill>
               </a:rPr>
               <a:t>与 </a:t>
@@ -3430,7 +3456,7 @@
             <a:r>
               <a:rPr lang="en-US" altLang="zh-CN" sz="1200">
                 <a:solidFill>
-                  <a:srgbClr val="FF0000"/>
+                  <a:srgbClr val="00B0F0"/>
                 </a:solidFill>
               </a:rPr>
               <a:t>security-release-process.md </a:t>
@@ -3438,7 +3464,7 @@
             <a:r>
               <a:rPr lang="zh-CN" altLang="en-US" sz="1200">
                 <a:solidFill>
-                  <a:srgbClr val="FF0000"/>
+                  <a:srgbClr val="00B0F0"/>
                 </a:solidFill>
               </a:rPr>
               <a:t>公开了私密报告渠道（</a:t>
@@ -3446,7 +3472,7 @@
             <a:r>
               <a:rPr lang="en-US" altLang="zh-CN" sz="1200">
                 <a:solidFill>
-                  <a:srgbClr val="FF0000"/>
+                  <a:srgbClr val="00B0F0"/>
                 </a:solidFill>
               </a:rPr>
               <a:t>cncf-karmada-security@lists.cncf.io）、2 </a:t>
@@ -3454,7 +3480,7 @@
             <a:r>
               <a:rPr lang="zh-CN" altLang="en-US" sz="1200">
                 <a:solidFill>
-                  <a:srgbClr val="FF0000"/>
+                  <a:srgbClr val="00B0F0"/>
                 </a:solidFill>
               </a:rPr>
               <a:t>个工作日响应承诺、漏洞分级、</a:t>
@@ -3462,7 +3488,7 @@
             <a:r>
               <a:rPr lang="en-US" altLang="zh-CN" sz="1200">
                 <a:solidFill>
-                  <a:srgbClr val="FF0000"/>
+                  <a:srgbClr val="00B0F0"/>
                 </a:solidFill>
               </a:rPr>
               <a:t>embargo/CVE </a:t>
@@ -3470,7 +3496,7 @@
             <a:r>
               <a:rPr lang="zh-CN" altLang="en-US" sz="1200">
                 <a:solidFill>
-                  <a:srgbClr val="FF0000"/>
+                  <a:srgbClr val="00B0F0"/>
                 </a:solidFill>
               </a:rPr>
               <a:t>流程、私有分发商列表与公开披露流程。</a:t>
@@ -3478,14 +3504,14 @@
             <a:r>
               <a:rPr lang="en-US" altLang="zh-CN" sz="1200">
                 <a:solidFill>
-                  <a:srgbClr val="FF0000"/>
+                  <a:srgbClr val="00B0F0"/>
                 </a:solidFill>
               </a:rPr>
               <a:t>https://github.com/karmada-io/community/blob/main/security-team/SECURITY.md ; https://github.com/karmada-io/community/blob/main/security-team/security-release-process.md</a:t>
             </a:r>
             <a:endParaRPr lang="en-US" altLang="zh-CN" sz="1200">
               <a:solidFill>
-                <a:srgbClr val="FF0000"/>
+                <a:srgbClr val="00B0F0"/>
               </a:solidFill>
             </a:endParaRPr>
           </a:p>
@@ -3603,19 +3629,26 @@
             </a:pPr>
             <a:r>
               <a:rPr lang="en-US" altLang="zh-CN" sz="1200">
+                <a:solidFill>
+                  <a:srgbClr val="00B0F0"/>
+                </a:solidFill>
                 <a:sym typeface="+mn-ea"/>
               </a:rPr>
               <a:t>Must </a:t>
             </a:r>
             <a:r>
-              <a:rPr lang="zh-CN" altLang="en-US" sz="1200"/>
-              <a:t>类别：项目必须指定主要语言和代码</a:t>
-            </a:r>
-            <a:r>
-              <a:rPr lang="zh-CN" altLang="en-US" sz="1200"/>
-              <a:t>风格</a:t>
-            </a:r>
-            <a:endParaRPr lang="zh-CN" altLang="en-US" sz="1200"/>
+              <a:rPr lang="zh-CN" altLang="en-US" sz="1200">
+                <a:solidFill>
+                  <a:srgbClr val="00B0F0"/>
+                </a:solidFill>
+              </a:rPr>
+              <a:t>类别：项目必须指定主要语言和代码风格</a:t>
+            </a:r>
+            <a:endParaRPr lang="zh-CN" altLang="en-US" sz="1200">
+              <a:solidFill>
+                <a:srgbClr val="00B0F0"/>
+              </a:solidFill>
+            </a:endParaRPr>
           </a:p>
           <a:p>
             <a:pPr marL="285750" indent="-285750">
@@ -3625,7 +3658,7 @@
             <a:r>
               <a:rPr lang="en-US" altLang="zh-CN" sz="1200">
                 <a:solidFill>
-                  <a:srgbClr val="FF0000"/>
+                  <a:srgbClr val="00B0F0"/>
                 </a:solidFill>
                 <a:sym typeface="+mn-ea"/>
               </a:rPr>
@@ -3634,7 +3667,7 @@
             <a:r>
               <a:rPr lang="zh-CN" altLang="en-US" sz="1200">
                 <a:solidFill>
-                  <a:srgbClr val="FF0000"/>
+                  <a:srgbClr val="00B0F0"/>
                 </a:solidFill>
                 <a:sym typeface="+mn-ea"/>
               </a:rPr>
@@ -3643,7 +3676,7 @@
             <a:r>
               <a:rPr lang="en-US" altLang="zh-CN" sz="1200">
                 <a:solidFill>
-                  <a:srgbClr val="FF0000"/>
+                  <a:srgbClr val="00B0F0"/>
                 </a:solidFill>
                 <a:sym typeface="+mn-ea"/>
               </a:rPr>
@@ -3652,7 +3685,7 @@
             <a:r>
               <a:rPr lang="zh-CN" altLang="en-US" sz="1200">
                 <a:solidFill>
-                  <a:srgbClr val="FF0000"/>
+                  <a:srgbClr val="00B0F0"/>
                 </a:solidFill>
                 <a:sym typeface="+mn-ea"/>
               </a:rPr>
@@ -3661,7 +3694,7 @@
             <a:r>
               <a:rPr lang="en-US" altLang="zh-CN" sz="1200">
                 <a:solidFill>
-                  <a:srgbClr val="FF0000"/>
+                  <a:srgbClr val="00B0F0"/>
                 </a:solidFill>
                 <a:sym typeface="+mn-ea"/>
               </a:rPr>
@@ -3669,7 +3702,7 @@
             </a:r>
             <a:endParaRPr lang="en-US" altLang="zh-CN" sz="1200">
               <a:solidFill>
-                <a:srgbClr val="FF0000"/>
+                <a:srgbClr val="00B0F0"/>
               </a:solidFill>
               <a:sym typeface="+mn-ea"/>
             </a:endParaRPr>
@@ -3703,23 +3736,34 @@
             </a:pPr>
             <a:r>
               <a:rPr lang="en-US" altLang="zh-CN" sz="1200">
+                <a:solidFill>
+                  <a:srgbClr val="00B0F0"/>
+                </a:solidFill>
                 <a:sym typeface="+mn-ea"/>
               </a:rPr>
               <a:t>Must</a:t>
             </a:r>
             <a:r>
-              <a:rPr lang="zh-CN" altLang="en-US" sz="1200"/>
-              <a:t>类别：要求项目</a:t>
-            </a:r>
-            <a:r>
-              <a:rPr lang="zh-CN" altLang="en-US" sz="1200"/>
-              <a:t>能够自动执行其选定的编码风格。</a:t>
-            </a:r>
-            <a:r>
-              <a:rPr lang="en-US" altLang="zh-CN" sz="1200"/>
+              <a:rPr lang="zh-CN" altLang="en-US" sz="1200">
+                <a:solidFill>
+                  <a:srgbClr val="00B0F0"/>
+                </a:solidFill>
+              </a:rPr>
+              <a:t>类别：要求项目能够自动执行其选定的编码风格。</a:t>
+            </a:r>
+            <a:r>
+              <a:rPr lang="en-US" altLang="zh-CN" sz="1200">
+                <a:solidFill>
+                  <a:srgbClr val="00B0F0"/>
+                </a:solidFill>
+              </a:rPr>
               <a:t>		</a:t>
             </a:r>
-            <a:endParaRPr lang="zh-CN" altLang="en-US" sz="1200"/>
+            <a:endParaRPr lang="zh-CN" altLang="en-US" sz="1200">
+              <a:solidFill>
+                <a:srgbClr val="00B0F0"/>
+              </a:solidFill>
+            </a:endParaRPr>
           </a:p>
           <a:p>
             <a:pPr marL="285750" indent="-285750">
@@ -3729,7 +3773,7 @@
             <a:r>
               <a:rPr lang="en-US" altLang="zh-CN" sz="1200">
                 <a:solidFill>
-                  <a:srgbClr val="FF0000"/>
+                  <a:srgbClr val="00B0F0"/>
                 </a:solidFill>
               </a:rPr>
               <a:t>Met</a:t>
@@ -3737,7 +3781,7 @@
             <a:r>
               <a:rPr lang="zh-CN" altLang="en-US" sz="1200">
                 <a:solidFill>
-                  <a:srgbClr val="FF0000"/>
+                  <a:srgbClr val="00B0F0"/>
                 </a:solidFill>
               </a:rPr>
               <a:t>：</a:t>
@@ -3745,7 +3789,7 @@
             <a:r>
               <a:rPr lang="en-US" altLang="zh-CN" sz="1200">
                 <a:solidFill>
-                  <a:srgbClr val="FF0000"/>
+                  <a:srgbClr val="00B0F0"/>
                 </a:solidFill>
               </a:rPr>
               <a:t> CI golangci job </a:t>
@@ -3753,7 +3797,7 @@
             <a:r>
               <a:rPr lang="zh-CN" altLang="en-US" sz="1200">
                 <a:solidFill>
-                  <a:srgbClr val="FF0000"/>
+                  <a:srgbClr val="00B0F0"/>
                 </a:solidFill>
               </a:rPr>
               <a:t>运行 </a:t>
@@ -3761,7 +3805,7 @@
             <a:r>
               <a:rPr lang="en-US" altLang="zh-CN" sz="1200">
                 <a:solidFill>
-                  <a:srgbClr val="FF0000"/>
+                  <a:srgbClr val="00B0F0"/>
                 </a:solidFill>
               </a:rPr>
               <a:t>hack/verify-staticcheck.sh（golangci-lint），</a:t>
@@ -3769,7 +3813,7 @@
             <a:r>
               <a:rPr lang="zh-CN" altLang="en-US" sz="1200">
                 <a:solidFill>
-                  <a:srgbClr val="FF0000"/>
+                  <a:srgbClr val="00B0F0"/>
                 </a:solidFill>
               </a:rPr>
               <a:t>启用 </a:t>
@@ -3777,7 +3821,7 @@
             <a:r>
               <a:rPr lang="en-US" altLang="zh-CN" sz="1200">
                 <a:solidFill>
-                  <a:srgbClr val="FF0000"/>
+                  <a:srgbClr val="00B0F0"/>
                 </a:solidFill>
               </a:rPr>
               <a:t>gofmt/goimports/gci </a:t>
@@ -3785,7 +3829,7 @@
             <a:r>
               <a:rPr lang="zh-CN" altLang="en-US" sz="1200">
                 <a:solidFill>
-                  <a:srgbClr val="FF0000"/>
+                  <a:srgbClr val="00B0F0"/>
                 </a:solidFill>
               </a:rPr>
               <a:t>格式化与多类 </a:t>
@@ -3793,7 +3837,7 @@
             <a:r>
               <a:rPr lang="en-US" altLang="zh-CN" sz="1200">
                 <a:solidFill>
-                  <a:srgbClr val="FF0000"/>
+                  <a:srgbClr val="00B0F0"/>
                 </a:solidFill>
               </a:rPr>
               <a:t>lint，</a:t>
@@ -3801,7 +3845,7 @@
             <a:r>
               <a:rPr lang="zh-CN" altLang="en-US" sz="1200">
                 <a:solidFill>
-                  <a:srgbClr val="FF0000"/>
+                  <a:srgbClr val="00B0F0"/>
                 </a:solidFill>
               </a:rPr>
               <a:t>在 </a:t>
@@ -3809,7 +3853,7 @@
             <a:r>
               <a:rPr lang="en-US" altLang="zh-CN" sz="1200">
                 <a:solidFill>
-                  <a:srgbClr val="FF0000"/>
+                  <a:srgbClr val="00B0F0"/>
                 </a:solidFill>
               </a:rPr>
               <a:t>push/PR </a:t>
@@ -3817,7 +3861,7 @@
             <a:r>
               <a:rPr lang="zh-CN" altLang="en-US" sz="1200">
                 <a:solidFill>
-                  <a:srgbClr val="FF0000"/>
+                  <a:srgbClr val="00B0F0"/>
                 </a:solidFill>
               </a:rPr>
               <a:t>强制通过。</a:t>
@@ -3825,14 +3869,14 @@
             <a:r>
               <a:rPr lang="en-US" altLang="zh-CN" sz="1200">
                 <a:solidFill>
-                  <a:srgbClr val="FF0000"/>
+                  <a:srgbClr val="00B0F0"/>
                 </a:solidFill>
               </a:rPr>
               <a:t>https://github.com/karmada-io/karmada/blob/master/.golangci.yml ; https://github.com/karmada-io/karmada/blob/master/.github/workflows/ci.yml</a:t>
             </a:r>
             <a:endParaRPr lang="en-US" altLang="zh-CN" sz="1200">
               <a:solidFill>
-                <a:srgbClr val="FF0000"/>
+                <a:srgbClr val="00B0F0"/>
               </a:solidFill>
             </a:endParaRPr>
           </a:p>
@@ -3950,15 +3994,26 @@
             </a:pPr>
             <a:r>
               <a:rPr lang="en-US" altLang="zh-CN" sz="1200">
+                <a:solidFill>
+                  <a:srgbClr val="00B0F0"/>
+                </a:solidFill>
                 <a:sym typeface="+mn-ea"/>
               </a:rPr>
               <a:t>Must </a:t>
             </a:r>
             <a:r>
-              <a:rPr lang="zh-CN" altLang="en-US" sz="1200"/>
+              <a:rPr lang="zh-CN" altLang="en-US" sz="1200">
+                <a:solidFill>
+                  <a:srgbClr val="00B0F0"/>
+                </a:solidFill>
+              </a:rPr>
               <a:t>类别：项目必须遵守用户传递的变量</a:t>
             </a:r>
-            <a:endParaRPr lang="en-US" altLang="zh-CN" sz="1200"/>
+            <a:endParaRPr lang="en-US" altLang="zh-CN" sz="1200">
+              <a:solidFill>
+                <a:srgbClr val="00B0F0"/>
+              </a:solidFill>
+            </a:endParaRPr>
           </a:p>
           <a:p>
             <a:pPr marL="285750" indent="-285750">
@@ -3968,7 +4023,7 @@
             <a:r>
               <a:rPr lang="en-US" altLang="zh-CN" sz="1200">
                 <a:solidFill>
-                  <a:srgbClr val="FF0000"/>
+                  <a:srgbClr val="00B0F0"/>
                 </a:solidFill>
                 <a:sym typeface="+mn-ea"/>
               </a:rPr>
@@ -3977,7 +4032,7 @@
             <a:r>
               <a:rPr lang="zh-CN" altLang="en-US" sz="1200">
                 <a:solidFill>
-                  <a:srgbClr val="FF0000"/>
+                  <a:srgbClr val="00B0F0"/>
                 </a:solidFill>
                 <a:sym typeface="+mn-ea"/>
               </a:rPr>
@@ -3986,7 +4041,7 @@
             <a:r>
               <a:rPr lang="en-US" altLang="zh-CN" sz="1200">
                 <a:solidFill>
-                  <a:srgbClr val="FF0000"/>
+                  <a:srgbClr val="00B0F0"/>
                 </a:solidFill>
                 <a:sym typeface="+mn-ea"/>
               </a:rPr>
@@ -3995,7 +4050,7 @@
             <a:r>
               <a:rPr lang="zh-CN" altLang="en-US" sz="1200">
                 <a:solidFill>
-                  <a:srgbClr val="FF0000"/>
+                  <a:srgbClr val="00B0F0"/>
                 </a:solidFill>
                 <a:sym typeface="+mn-ea"/>
               </a:rPr>
@@ -4004,7 +4059,7 @@
             <a:r>
               <a:rPr lang="en-US" altLang="zh-CN" sz="1200">
                 <a:solidFill>
-                  <a:srgbClr val="FF0000"/>
+                  <a:srgbClr val="00B0F0"/>
                 </a:solidFill>
                 <a:sym typeface="+mn-ea"/>
               </a:rPr>
@@ -4013,7 +4068,7 @@
             <a:r>
               <a:rPr lang="zh-CN" altLang="en-US" sz="1200">
                 <a:solidFill>
-                  <a:srgbClr val="FF0000"/>
+                  <a:srgbClr val="00B0F0"/>
                 </a:solidFill>
                 <a:sym typeface="+mn-ea"/>
               </a:rPr>
@@ -4022,7 +4077,7 @@
             <a:r>
               <a:rPr lang="en-US" altLang="zh-CN" sz="1200">
                 <a:solidFill>
-                  <a:srgbClr val="FF0000"/>
+                  <a:srgbClr val="00B0F0"/>
                 </a:solidFill>
                 <a:sym typeface="+mn-ea"/>
               </a:rPr>
@@ -4031,7 +4086,7 @@
             <a:r>
               <a:rPr lang="zh-CN" altLang="en-US" sz="1200">
                 <a:solidFill>
-                  <a:srgbClr val="FF0000"/>
+                  <a:srgbClr val="00B0F0"/>
                 </a:solidFill>
                 <a:sym typeface="+mn-ea"/>
               </a:rPr>
@@ -4040,7 +4095,7 @@
             <a:r>
               <a:rPr lang="en-US" altLang="zh-CN" sz="1200">
                 <a:solidFill>
-                  <a:srgbClr val="FF0000"/>
+                  <a:srgbClr val="00B0F0"/>
                 </a:solidFill>
                 <a:sym typeface="+mn-ea"/>
               </a:rPr>
@@ -4049,7 +4104,7 @@
             <a:r>
               <a:rPr lang="zh-CN" altLang="en-US" sz="1200">
                 <a:solidFill>
-                  <a:srgbClr val="FF0000"/>
+                  <a:srgbClr val="00B0F0"/>
                 </a:solidFill>
                 <a:sym typeface="+mn-ea"/>
               </a:rPr>
@@ -4058,7 +4113,7 @@
             <a:r>
               <a:rPr lang="en-US" altLang="zh-CN" sz="1200">
                 <a:solidFill>
-                  <a:srgbClr val="FF0000"/>
+                  <a:srgbClr val="00B0F0"/>
                 </a:solidFill>
                 <a:sym typeface="+mn-ea"/>
               </a:rPr>
@@ -4067,7 +4122,7 @@
             <a:r>
               <a:rPr lang="zh-CN" altLang="en-US" sz="1200">
                 <a:solidFill>
-                  <a:srgbClr val="FF0000"/>
+                  <a:srgbClr val="00B0F0"/>
                 </a:solidFill>
                 <a:sym typeface="+mn-ea"/>
               </a:rPr>
@@ -4076,7 +4131,7 @@
             <a:r>
               <a:rPr lang="en-US" altLang="zh-CN" sz="1200">
                 <a:solidFill>
-                  <a:srgbClr val="FF0000"/>
+                  <a:srgbClr val="00B0F0"/>
                 </a:solidFill>
                 <a:sym typeface="+mn-ea"/>
               </a:rPr>
@@ -4085,7 +4140,7 @@
             <a:r>
               <a:rPr lang="en-US" altLang="zh-CN" sz="1200">
                 <a:solidFill>
-                  <a:srgbClr val="FF0000"/>
+                  <a:srgbClr val="00B0F0"/>
                 </a:solidFill>
                 <a:sym typeface="+mn-ea"/>
                 <a:hlinkClick r:id="rId2" action="ppaction://hlinkfile"/>
@@ -4094,7 +4149,7 @@
             </a:r>
             <a:endParaRPr lang="en-US" altLang="zh-CN" sz="1200">
               <a:solidFill>
-                <a:srgbClr val="FF0000"/>
+                <a:srgbClr val="00B0F0"/>
               </a:solidFill>
               <a:sym typeface="+mn-ea"/>
             </a:endParaRPr>
@@ -4107,7 +4162,7 @@
             <a:r>
               <a:rPr lang="en-US" altLang="zh-CN" sz="1200">
                 <a:solidFill>
-                  <a:srgbClr val="FF0000"/>
+                  <a:srgbClr val="00B0F0"/>
                 </a:solidFill>
                 <a:sym typeface="+mn-ea"/>
               </a:rPr>
@@ -4116,7 +4171,7 @@
             <a:r>
               <a:rPr lang="zh-CN" altLang="en-US" sz="1200">
                 <a:solidFill>
-                  <a:srgbClr val="FF0000"/>
+                  <a:srgbClr val="00B0F0"/>
                 </a:solidFill>
                 <a:sym typeface="+mn-ea"/>
               </a:rPr>
@@ -4125,7 +4180,7 @@
             <a:r>
               <a:rPr lang="en-US" altLang="zh-CN" sz="1200">
                 <a:solidFill>
-                  <a:srgbClr val="FF0000"/>
+                  <a:srgbClr val="00B0F0"/>
                 </a:solidFill>
                 <a:sym typeface="+mn-ea"/>
               </a:rPr>
@@ -4134,7 +4189,7 @@
             <a:r>
               <a:rPr lang="zh-CN" altLang="en-US" sz="1200">
                 <a:solidFill>
-                  <a:srgbClr val="FF0000"/>
+                  <a:srgbClr val="00B0F0"/>
                 </a:solidFill>
                 <a:sym typeface="+mn-ea"/>
               </a:rPr>
@@ -4143,7 +4198,7 @@
             <a:r>
               <a:rPr lang="en-US" altLang="zh-CN" sz="1200">
                 <a:solidFill>
-                  <a:srgbClr val="FF0000"/>
+                  <a:srgbClr val="00B0F0"/>
                 </a:solidFill>
                 <a:sym typeface="+mn-ea"/>
               </a:rPr>
@@ -4152,7 +4207,7 @@
             <a:r>
               <a:rPr lang="zh-CN" altLang="en-US" sz="1200">
                 <a:solidFill>
-                  <a:srgbClr val="FF0000"/>
+                  <a:srgbClr val="00B0F0"/>
                 </a:solidFill>
                 <a:sym typeface="+mn-ea"/>
               </a:rPr>
@@ -4161,7 +4216,7 @@
             <a:r>
               <a:rPr lang="en-US" altLang="zh-CN" sz="1200">
                 <a:solidFill>
-                  <a:srgbClr val="FF0000"/>
+                  <a:srgbClr val="00B0F0"/>
                 </a:solidFill>
                 <a:sym typeface="+mn-ea"/>
               </a:rPr>
@@ -4169,7 +4224,7 @@
             </a:r>
             <a:endParaRPr lang="en-US" altLang="zh-CN" sz="1200">
               <a:solidFill>
-                <a:srgbClr val="FF0000"/>
+                <a:srgbClr val="00B0F0"/>
               </a:solidFill>
               <a:sym typeface="+mn-ea"/>
             </a:endParaRPr>
@@ -5029,15 +5084,26 @@
             </a:pPr>
             <a:r>
               <a:rPr lang="en-US" altLang="zh-CN" sz="1200">
+                <a:solidFill>
+                  <a:srgbClr val="00B0F0"/>
+                </a:solidFill>
                 <a:sym typeface="+mn-ea"/>
               </a:rPr>
               <a:t>Must </a:t>
             </a:r>
             <a:r>
-              <a:rPr lang="zh-CN" altLang="en-US" sz="1200"/>
+              <a:rPr lang="zh-CN" altLang="en-US" sz="1200">
+                <a:solidFill>
+                  <a:srgbClr val="00B0F0"/>
+                </a:solidFill>
+              </a:rPr>
               <a:t>类别：项目内必须有一个以上的静态语言漏洞分析工具</a:t>
             </a:r>
-            <a:endParaRPr lang="en-US" altLang="zh-CN" sz="1200"/>
+            <a:endParaRPr lang="en-US" altLang="zh-CN" sz="1200">
+              <a:solidFill>
+                <a:srgbClr val="00B0F0"/>
+              </a:solidFill>
+            </a:endParaRPr>
           </a:p>
           <a:p>
             <a:pPr marL="285750" indent="-285750">
@@ -5047,7 +5113,7 @@
             <a:r>
               <a:rPr lang="en-US" altLang="zh-CN" sz="1200">
                 <a:solidFill>
-                  <a:srgbClr val="FF0000"/>
+                  <a:srgbClr val="00B0F0"/>
                 </a:solidFill>
                 <a:sym typeface="+mn-ea"/>
               </a:rPr>
@@ -5056,7 +5122,7 @@
             <a:r>
               <a:rPr lang="zh-CN" altLang="en-US" sz="1200">
                 <a:solidFill>
-                  <a:srgbClr val="FF0000"/>
+                  <a:srgbClr val="00B0F0"/>
                 </a:solidFill>
                 <a:sym typeface="+mn-ea"/>
               </a:rPr>
@@ -5065,7 +5131,7 @@
             <a:r>
               <a:rPr lang="en-US" altLang="zh-CN" sz="1200">
                 <a:solidFill>
-                  <a:srgbClr val="FF0000"/>
+                  <a:srgbClr val="00B0F0"/>
                 </a:solidFill>
                 <a:sym typeface="+mn-ea"/>
               </a:rPr>
@@ -5074,7 +5140,7 @@
             <a:r>
               <a:rPr lang="zh-CN" altLang="en-US" sz="1200">
                 <a:solidFill>
-                  <a:srgbClr val="FF0000"/>
+                  <a:srgbClr val="00B0F0"/>
                 </a:solidFill>
                 <a:sym typeface="+mn-ea"/>
               </a:rPr>
@@ -5083,7 +5149,7 @@
             <a:r>
               <a:rPr lang="en-US" altLang="zh-CN" sz="1200">
                 <a:solidFill>
-                  <a:srgbClr val="FF0000"/>
+                  <a:srgbClr val="00B0F0"/>
                 </a:solidFill>
                 <a:sym typeface="+mn-ea"/>
               </a:rPr>
@@ -5092,7 +5158,7 @@
             <a:r>
               <a:rPr lang="zh-CN" altLang="en-US" sz="1200">
                 <a:solidFill>
-                  <a:srgbClr val="FF0000"/>
+                  <a:srgbClr val="00B0F0"/>
                 </a:solidFill>
                 <a:sym typeface="+mn-ea"/>
               </a:rPr>
@@ -5101,7 +5167,7 @@
             <a:r>
               <a:rPr lang="en-US" altLang="zh-CN" sz="1200">
                 <a:solidFill>
-                  <a:srgbClr val="FF0000"/>
+                  <a:srgbClr val="00B0F0"/>
                 </a:solidFill>
                 <a:sym typeface="+mn-ea"/>
               </a:rPr>
@@ -5110,7 +5176,7 @@
             <a:r>
               <a:rPr lang="zh-CN" altLang="en-US" sz="1200">
                 <a:solidFill>
-                  <a:srgbClr val="FF0000"/>
+                  <a:srgbClr val="00B0F0"/>
                 </a:solidFill>
                 <a:sym typeface="+mn-ea"/>
               </a:rPr>
@@ -5119,7 +5185,7 @@
             <a:r>
               <a:rPr lang="en-US" altLang="zh-CN" sz="1200">
                 <a:solidFill>
-                  <a:srgbClr val="FF0000"/>
+                  <a:srgbClr val="00B0F0"/>
                 </a:solidFill>
                 <a:sym typeface="+mn-ea"/>
               </a:rPr>
@@ -5128,7 +5194,7 @@
             <a:r>
               <a:rPr lang="zh-CN" altLang="en-US" sz="1200">
                 <a:solidFill>
-                  <a:srgbClr val="FF0000"/>
+                  <a:srgbClr val="00B0F0"/>
                 </a:solidFill>
                 <a:sym typeface="+mn-ea"/>
               </a:rPr>
@@ -5136,7 +5202,7 @@
             </a:r>
             <a:endParaRPr lang="zh-CN" altLang="en-US" sz="1200">
               <a:solidFill>
-                <a:srgbClr val="FF0000"/>
+                <a:srgbClr val="00B0F0"/>
               </a:solidFill>
               <a:sym typeface="+mn-ea"/>
             </a:endParaRPr>
@@ -5149,7 +5215,7 @@
             <a:r>
               <a:rPr lang="en-US" altLang="zh-CN" sz="1200">
                 <a:solidFill>
-                  <a:srgbClr val="FF0000"/>
+                  <a:srgbClr val="00B0F0"/>
                 </a:solidFill>
                 <a:sym typeface="+mn-ea"/>
               </a:rPr>
@@ -5157,7 +5223,7 @@
             </a:r>
             <a:endParaRPr lang="en-US" altLang="zh-CN" sz="1200">
               <a:solidFill>
-                <a:srgbClr val="FF0000"/>
+                <a:srgbClr val="00B0F0"/>
               </a:solidFill>
               <a:sym typeface="+mn-ea"/>
             </a:endParaRPr>
@@ -5167,9 +5233,9 @@
               <a:buFont typeface="Arial" panose="020B0604020202020204" pitchFamily="34" charset="0"/>
               <a:buChar char="•"/>
             </a:pPr>
-            <a:endParaRPr lang="zh-CN" altLang="en-US" sz="1200">
+            <a:endParaRPr lang="en-US" altLang="zh-CN" sz="1200">
               <a:solidFill>
-                <a:srgbClr val="FF0000"/>
+                <a:srgbClr val="00B0F0"/>
               </a:solidFill>
               <a:sym typeface="+mn-ea"/>
             </a:endParaRPr>
@@ -5203,19 +5269,34 @@
             </a:pPr>
             <a:r>
               <a:rPr lang="en-US" altLang="zh-CN" sz="1200">
+                <a:solidFill>
+                  <a:srgbClr val="00B0F0"/>
+                </a:solidFill>
                 <a:sym typeface="+mn-ea"/>
               </a:rPr>
               <a:t>Must</a:t>
             </a:r>
             <a:r>
-              <a:rPr lang="zh-CN" altLang="en-US" sz="1200"/>
+              <a:rPr lang="zh-CN" altLang="en-US" sz="1200">
+                <a:solidFill>
+                  <a:srgbClr val="00B0F0"/>
+                </a:solidFill>
+              </a:rPr>
               <a:t>类别：如果项目使用的编程语言是不安全语言编写，需要一个动态检测工具检测内存安全。</a:t>
             </a:r>
             <a:r>
-              <a:rPr lang="en-US" altLang="zh-CN" sz="1200"/>
+              <a:rPr lang="en-US" altLang="zh-CN" sz="1200">
+                <a:solidFill>
+                  <a:srgbClr val="00B0F0"/>
+                </a:solidFill>
+              </a:rPr>
               <a:t>		</a:t>
             </a:r>
-            <a:endParaRPr lang="zh-CN" altLang="en-US" sz="1200"/>
+            <a:endParaRPr lang="zh-CN" altLang="en-US" sz="1200">
+              <a:solidFill>
+                <a:srgbClr val="00B0F0"/>
+              </a:solidFill>
+            </a:endParaRPr>
           </a:p>
           <a:p>
             <a:pPr marL="285750" indent="-285750">
@@ -5225,7 +5306,7 @@
             <a:r>
               <a:rPr lang="en-US" altLang="zh-CN" sz="1200">
                 <a:solidFill>
-                  <a:srgbClr val="FF0000"/>
+                  <a:srgbClr val="00B0F0"/>
                 </a:solidFill>
                 <a:sym typeface="+mn-ea"/>
               </a:rPr>
@@ -5234,7 +5315,7 @@
             <a:r>
               <a:rPr lang="zh-CN" altLang="en-US" sz="1200">
                 <a:solidFill>
-                  <a:srgbClr val="FF0000"/>
+                  <a:srgbClr val="00B0F0"/>
                 </a:solidFill>
               </a:rPr>
               <a:t>：</a:t>
@@ -5242,7 +5323,7 @@
             <a:r>
               <a:rPr lang="en-US" altLang="zh-CN" sz="1200">
                 <a:solidFill>
-                  <a:srgbClr val="FF0000"/>
+                  <a:srgbClr val="00B0F0"/>
                 </a:solidFill>
               </a:rPr>
               <a:t>Karmada </a:t>
@@ -5250,7 +5331,7 @@
             <a:r>
               <a:rPr lang="zh-CN" altLang="en-US" sz="1200">
                 <a:solidFill>
-                  <a:srgbClr val="FF0000"/>
+                  <a:srgbClr val="00B0F0"/>
                 </a:solidFill>
               </a:rPr>
               <a:t>主要使用 </a:t>
@@ -5258,7 +5339,7 @@
             <a:r>
               <a:rPr lang="en-US" altLang="zh-CN" sz="1200">
                 <a:solidFill>
-                  <a:srgbClr val="FF0000"/>
+                  <a:srgbClr val="00B0F0"/>
                 </a:solidFill>
               </a:rPr>
               <a:t>Go </a:t>
@@ -5266,7 +5347,7 @@
             <a:r>
               <a:rPr lang="zh-CN" altLang="en-US" sz="1200">
                 <a:solidFill>
-                  <a:srgbClr val="FF0000"/>
+                  <a:srgbClr val="00B0F0"/>
                 </a:solidFill>
               </a:rPr>
               <a:t>语言编写，而 </a:t>
@@ -5274,7 +5355,7 @@
             <a:r>
               <a:rPr lang="en-US" altLang="zh-CN" sz="1200">
                 <a:solidFill>
-                  <a:srgbClr val="FF0000"/>
+                  <a:srgbClr val="00B0F0"/>
                 </a:solidFill>
               </a:rPr>
               <a:t>Go </a:t>
@@ -5282,7 +5363,7 @@
             <a:r>
               <a:rPr lang="zh-CN" altLang="en-US" sz="1200">
                 <a:solidFill>
-                  <a:srgbClr val="FF0000"/>
+                  <a:srgbClr val="00B0F0"/>
                 </a:solidFill>
               </a:rPr>
               <a:t>是内存安全的语言（具有垃圾回收、数组越界检查、自动内存管理等），不属于“内存不安全语言”（如 </a:t>
@@ -5290,14 +5371,14 @@
             <a:r>
               <a:rPr lang="en-US" altLang="zh-CN" sz="1200">
                 <a:solidFill>
-                  <a:srgbClr val="FF0000"/>
+                  <a:srgbClr val="00B0F0"/>
                 </a:solidFill>
               </a:rPr>
               <a:t>C/C++）。</a:t>
             </a:r>
             <a:endParaRPr lang="en-US" altLang="zh-CN" sz="1200">
               <a:solidFill>
-                <a:srgbClr val="FF0000"/>
+                <a:srgbClr val="00B0F0"/>
               </a:solidFill>
             </a:endParaRPr>
           </a:p>
@@ -5308,7 +5389,7 @@
             </a:pPr>
             <a:endParaRPr lang="en-US" altLang="zh-CN" sz="1200">
               <a:solidFill>
-                <a:srgbClr val="FF0000"/>
+                <a:srgbClr val="00B0F0"/>
               </a:solidFill>
             </a:endParaRPr>
           </a:p>
@@ -5320,7 +5401,7 @@
             <a:r>
               <a:rPr lang="zh-CN" altLang="en-US" sz="1200">
                 <a:solidFill>
-                  <a:srgbClr val="FF0000"/>
+                  <a:srgbClr val="00B0F0"/>
                 </a:solidFill>
               </a:rPr>
               <a:t>构建时禁用了 </a:t>
@@ -5328,7 +5409,7 @@
             <a:r>
               <a:rPr lang="en-US" altLang="zh-CN" sz="1200">
                 <a:solidFill>
-                  <a:srgbClr val="FF0000"/>
+                  <a:srgbClr val="00B0F0"/>
                 </a:solidFill>
               </a:rPr>
               <a:t>cgo：</a:t>
@@ -5336,7 +5417,7 @@
             <a:r>
               <a:rPr lang="zh-CN" altLang="en-US" sz="1200">
                 <a:solidFill>
-                  <a:srgbClr val="FF0000"/>
+                  <a:srgbClr val="00B0F0"/>
                 </a:solidFill>
               </a:rPr>
               <a:t>在 </a:t>
@@ -5344,7 +5425,7 @@
             <a:r>
               <a:rPr lang="en-US" altLang="zh-CN" sz="1200">
                 <a:solidFill>
-                  <a:srgbClr val="FF0000"/>
+                  <a:srgbClr val="00B0F0"/>
                 </a:solidFill>
               </a:rPr>
               <a:t>Karmada </a:t>
@@ -5352,7 +5433,7 @@
             <a:r>
               <a:rPr lang="zh-CN" altLang="en-US" sz="1200">
                 <a:solidFill>
-                  <a:srgbClr val="FF0000"/>
+                  <a:srgbClr val="00B0F0"/>
                 </a:solidFill>
               </a:rPr>
               <a:t>的构建脚本 </a:t>
@@ -5360,7 +5441,7 @@
             <a:r>
               <a:rPr lang="en-US" altLang="zh-CN" sz="1200">
                 <a:solidFill>
-                  <a:srgbClr val="FF0000"/>
+                  <a:srgbClr val="00B0F0"/>
                 </a:solidFill>
               </a:rPr>
               <a:t>hack/build.sh </a:t>
@@ -5368,7 +5449,7 @@
             <a:r>
               <a:rPr lang="zh-CN" altLang="en-US" sz="1200">
                 <a:solidFill>
-                  <a:srgbClr val="FF0000"/>
+                  <a:srgbClr val="00B0F0"/>
                 </a:solidFill>
               </a:rPr>
               <a:t>中，明确设置了 </a:t>
@@ -5376,7 +5457,7 @@
             <a:r>
               <a:rPr lang="en-US" altLang="zh-CN" sz="1200">
                 <a:solidFill>
-                  <a:srgbClr val="FF0000"/>
+                  <a:srgbClr val="00B0F0"/>
                 </a:solidFill>
               </a:rPr>
               <a:t>CGO_ENABLED=0，</a:t>
@@ -5384,7 +5465,7 @@
             <a:r>
               <a:rPr lang="zh-CN" altLang="en-US" sz="1200">
                 <a:solidFill>
-                  <a:srgbClr val="FF0000"/>
+                  <a:srgbClr val="00B0F0"/>
                 </a:solidFill>
               </a:rPr>
               <a:t>这意味着构建的二进制文件不包含任何 </a:t>
@@ -5392,7 +5473,7 @@
             <a:r>
               <a:rPr lang="en-US" altLang="zh-CN" sz="1200">
                 <a:solidFill>
-                  <a:srgbClr val="FF0000"/>
+                  <a:srgbClr val="00B0F0"/>
                 </a:solidFill>
               </a:rPr>
               <a:t>C </a:t>
@@ -5400,7 +5481,7 @@
             <a:r>
               <a:rPr lang="zh-CN" altLang="en-US" sz="1200">
                 <a:solidFill>
-                  <a:srgbClr val="FF0000"/>
+                  <a:srgbClr val="00B0F0"/>
                 </a:solidFill>
               </a:rPr>
               <a:t>代码，完全由 </a:t>
@@ -5408,7 +5489,7 @@
             <a:r>
               <a:rPr lang="en-US" altLang="zh-CN" sz="1200">
                 <a:solidFill>
-                  <a:srgbClr val="FF0000"/>
+                  <a:srgbClr val="00B0F0"/>
                 </a:solidFill>
               </a:rPr>
               <a:t>Go </a:t>
@@ -5416,14 +5497,14 @@
             <a:r>
               <a:rPr lang="zh-CN" altLang="en-US" sz="1200">
                 <a:solidFill>
-                  <a:srgbClr val="FF0000"/>
+                  <a:srgbClr val="00B0F0"/>
                 </a:solidFill>
               </a:rPr>
               <a:t>代码编译而成。</a:t>
             </a:r>
             <a:endParaRPr lang="zh-CN" altLang="en-US" sz="1200">
               <a:solidFill>
-                <a:srgbClr val="FF0000"/>
+                <a:srgbClr val="00B0F0"/>
               </a:solidFill>
             </a:endParaRPr>
           </a:p>
@@ -5434,7 +5515,7 @@
             </a:pPr>
             <a:endParaRPr lang="en-US" altLang="zh-CN" sz="1200">
               <a:solidFill>
-                <a:srgbClr val="FF0000"/>
+                <a:srgbClr val="00B0F0"/>
               </a:solidFill>
             </a:endParaRPr>
           </a:p>
@@ -5446,7 +5527,7 @@
             <a:r>
               <a:rPr lang="zh-CN" altLang="en-US" sz="1200">
                 <a:solidFill>
-                  <a:srgbClr val="FF0000"/>
+                  <a:srgbClr val="00B0F0"/>
                 </a:solidFill>
               </a:rPr>
               <a:t>证据：</a:t>
@@ -5454,7 +5535,7 @@
             <a:r>
               <a:rPr lang="en-US" altLang="zh-CN" sz="1200">
                 <a:solidFill>
-                  <a:srgbClr val="FF0000"/>
+                  <a:srgbClr val="00B0F0"/>
                 </a:solidFill>
               </a:rPr>
               <a:t>https://github.com/karmada-io/karmada/blob/master/hack/build.sh </a:t>
@@ -5462,7 +5543,7 @@
             <a:r>
               <a:rPr lang="zh-CN" altLang="en-US" sz="1200">
                 <a:solidFill>
-                  <a:srgbClr val="FF0000"/>
+                  <a:srgbClr val="00B0F0"/>
                 </a:solidFill>
               </a:rPr>
               <a:t>中的 </a:t>
@@ -5470,14 +5551,14 @@
             <a:r>
               <a:rPr lang="en-US" altLang="zh-CN" sz="1200">
                 <a:solidFill>
-                  <a:srgbClr val="FF0000"/>
+                  <a:srgbClr val="00B0F0"/>
                 </a:solidFill>
               </a:rPr>
               <a:t>CGO_ENABLED=0 GOOS=${os} GOARCH=${arch} go build ...</a:t>
             </a:r>
             <a:endParaRPr lang="en-US" altLang="zh-CN" sz="1200">
               <a:solidFill>
-                <a:srgbClr val="FF0000"/>
+                <a:srgbClr val="00B0F0"/>
               </a:solidFill>
             </a:endParaRPr>
           </a:p>
@@ -9638,110 +9719,113 @@
               <a:buChar char="•"/>
             </a:pPr>
             <a:r>
-              <a:rPr lang="en-US" altLang="zh-CN" sz="1200"/>
+              <a:rPr lang="en-US" altLang="zh-CN" sz="1200">
+                <a:solidFill>
+                  <a:srgbClr val="00B0F0"/>
+                </a:solidFill>
+              </a:rPr>
               <a:t>should </a:t>
             </a:r>
             <a:r>
-              <a:rPr lang="zh-CN" altLang="en-US" sz="1200"/>
+              <a:rPr lang="zh-CN" altLang="en-US" sz="1200">
+                <a:solidFill>
+                  <a:srgbClr val="00B0F0"/>
+                </a:solidFill>
+              </a:rPr>
               <a:t>类别：要求提交使用 </a:t>
             </a:r>
             <a:r>
-              <a:rPr lang="en-US" altLang="zh-CN" sz="1200"/>
+              <a:rPr lang="en-US" altLang="zh-CN" sz="1200">
+                <a:solidFill>
+                  <a:srgbClr val="00B0F0"/>
+                </a:solidFill>
+              </a:rPr>
               <a:t>git commit -s </a:t>
             </a:r>
             <a:r>
-              <a:rPr lang="zh-CN" altLang="en-US" sz="1200"/>
+              <a:rPr lang="zh-CN" altLang="en-US" sz="1200">
+                <a:solidFill>
+                  <a:srgbClr val="00B0F0"/>
+                </a:solidFill>
+              </a:rPr>
               <a:t>添加 </a:t>
             </a:r>
             <a:r>
-              <a:rPr lang="en-US" altLang="zh-CN" sz="1200"/>
+              <a:rPr lang="en-US" altLang="zh-CN" sz="1200">
+                <a:solidFill>
+                  <a:srgbClr val="00B0F0"/>
+                </a:solidFill>
+              </a:rPr>
               <a:t>Signed-off-by </a:t>
             </a:r>
             <a:r>
-              <a:rPr lang="zh-CN" altLang="en-US" sz="1200"/>
+              <a:rPr lang="zh-CN" altLang="en-US" sz="1200">
+                <a:solidFill>
+                  <a:srgbClr val="00B0F0"/>
+                </a:solidFill>
+              </a:rPr>
               <a:t>并解释其法律含义，同时启用 </a:t>
             </a:r>
             <a:r>
-              <a:rPr lang="en-US" altLang="zh-CN" sz="1200"/>
+              <a:rPr lang="en-US" altLang="zh-CN" sz="1200">
+                <a:solidFill>
+                  <a:srgbClr val="00B0F0"/>
+                </a:solidFill>
+              </a:rPr>
               <a:t>DCO </a:t>
             </a:r>
             <a:r>
-              <a:rPr lang="zh-CN" altLang="en-US" sz="1200"/>
+              <a:rPr lang="zh-CN" altLang="en-US" sz="1200">
+                <a:solidFill>
+                  <a:srgbClr val="00B0F0"/>
+                </a:solidFill>
+              </a:rPr>
               <a:t>机器人（如 </a:t>
             </a:r>
             <a:r>
-              <a:rPr lang="en-US" altLang="zh-CN" sz="1200"/>
+              <a:rPr lang="en-US" altLang="zh-CN" sz="1200">
+                <a:solidFill>
+                  <a:srgbClr val="00B0F0"/>
+                </a:solidFill>
+              </a:rPr>
               <a:t>probot/dco）</a:t>
             </a:r>
             <a:r>
-              <a:rPr lang="zh-CN" altLang="en-US" sz="1200"/>
+              <a:rPr lang="zh-CN" altLang="en-US" sz="1200">
+                <a:solidFill>
+                  <a:srgbClr val="00B0F0"/>
+                </a:solidFill>
+              </a:rPr>
               <a:t>在 </a:t>
             </a:r>
             <a:r>
-              <a:rPr lang="en-US" altLang="zh-CN" sz="1200"/>
+              <a:rPr lang="en-US" altLang="zh-CN" sz="1200">
+                <a:solidFill>
+                  <a:srgbClr val="00B0F0"/>
+                </a:solidFill>
+              </a:rPr>
               <a:t>CI </a:t>
             </a:r>
             <a:r>
-              <a:rPr lang="zh-CN" altLang="en-US" sz="1200"/>
+              <a:rPr lang="zh-CN" altLang="en-US" sz="1200">
+                <a:solidFill>
+                  <a:srgbClr val="00B0F0"/>
+                </a:solidFill>
+              </a:rPr>
               <a:t>中强制校验。</a:t>
             </a:r>
             <a:r>
               <a:rPr lang="en-US" altLang="zh-CN" sz="1200">
                 <a:solidFill>
-                  <a:srgbClr val="FF0000"/>
-                </a:solidFill>
-              </a:rPr>
-              <a:t>Unmet:https://github.com/karmadaio/karmada/blob/master/CONTRIBUTING.md</a:t>
-            </a:r>
-            <a:r>
-              <a:rPr lang="zh-CN" altLang="en-US" sz="1200">
-                <a:solidFill>
-                  <a:srgbClr val="FF0000"/>
-                </a:solidFill>
-              </a:rPr>
-              <a:t>没有明确说明需要使用</a:t>
-            </a:r>
-            <a:r>
-              <a:rPr lang="zh-CN" altLang="en-US" sz="1200">
-                <a:solidFill>
-                  <a:srgbClr val="FF0000"/>
-                </a:solidFill>
-                <a:sym typeface="+mn-ea"/>
-              </a:rPr>
-              <a:t>使用 </a:t>
-            </a:r>
-            <a:r>
-              <a:rPr lang="en-US" altLang="zh-CN" sz="1200">
-                <a:solidFill>
-                  <a:srgbClr val="FF0000"/>
-                </a:solidFill>
-                <a:sym typeface="+mn-ea"/>
-              </a:rPr>
-              <a:t>git commit -s </a:t>
-            </a:r>
-            <a:r>
-              <a:rPr lang="zh-CN" altLang="en-US" sz="1200">
-                <a:solidFill>
-                  <a:srgbClr val="FF0000"/>
-                </a:solidFill>
-                <a:sym typeface="+mn-ea"/>
-              </a:rPr>
-              <a:t>添加 </a:t>
-            </a:r>
-            <a:r>
-              <a:rPr lang="en-US" altLang="zh-CN" sz="1200">
-                <a:solidFill>
-                  <a:srgbClr val="FF0000"/>
-                </a:solidFill>
-                <a:sym typeface="+mn-ea"/>
-              </a:rPr>
-              <a:t>Signed-off-by </a:t>
+                  <a:srgbClr val="00B0F0"/>
+                </a:solidFill>
+              </a:rPr>
+              <a:t>Met:https://karmada.io/docs/contributor/github-workflow/#5-commit</a:t>
             </a:r>
             <a:endParaRPr lang="en-US" altLang="zh-CN" sz="1200">
               <a:solidFill>
-                <a:srgbClr val="FF0000"/>
+                <a:srgbClr val="00B0F0"/>
               </a:solidFill>
-              <a:sym typeface="+mn-ea"/>
             </a:endParaRPr>
           </a:p>
         </p:txBody>
@@ -9772,37 +9856,49 @@
               <a:buChar char="•"/>
             </a:pPr>
             <a:r>
-              <a:rPr lang="en-US" altLang="zh-CN" sz="1200"/>
+              <a:rPr lang="en-US" altLang="zh-CN" sz="1200">
+                <a:solidFill>
+                  <a:srgbClr val="00B0F0"/>
+                </a:solidFill>
+              </a:rPr>
               <a:t>MUST </a:t>
             </a:r>
             <a:r>
-              <a:rPr lang="zh-CN" altLang="en-US" sz="1200"/>
+              <a:rPr lang="zh-CN" altLang="en-US" sz="1200">
+                <a:solidFill>
+                  <a:srgbClr val="00B0F0"/>
+                </a:solidFill>
+              </a:rPr>
               <a:t>类别：项目必须公开定义治理价值观，成员制度，维护者选拔与投票，</a:t>
             </a:r>
             <a:r>
-              <a:rPr lang="en-US" altLang="zh-CN" sz="1200"/>
+              <a:rPr lang="en-US" altLang="zh-CN" sz="1200">
+                <a:solidFill>
+                  <a:srgbClr val="00B0F0"/>
+                </a:solidFill>
+              </a:rPr>
               <a:t>security response</a:t>
             </a:r>
             <a:r>
-              <a:rPr lang="zh-CN" altLang="en-US" sz="1200"/>
+              <a:rPr lang="zh-CN" altLang="en-US" sz="1200">
+                <a:solidFill>
+                  <a:srgbClr val="00B0F0"/>
+                </a:solidFill>
+              </a:rPr>
               <a:t>等决策方式和治理模式。</a:t>
             </a:r>
             <a:r>
-              <a:rPr lang="en-US" altLang="zh-CN" sz="1200"/>
-              <a:t>    </a:t>
-            </a:r>
-            <a:r>
-              <a:rPr lang="en-US" altLang="zh-CN" sz="1200">
-                <a:solidFill>
-                  <a:srgbClr val="FF0000"/>
-                </a:solidFill>
-              </a:rPr>
-              <a:t>Met:https://github.com/karmadaio/community/blob/main/GOVERNANCE.md</a:t>
-            </a:r>
-            <a:r>
-              <a:rPr lang="zh-CN" altLang="en-US" sz="1200">
-                <a:solidFill>
-                  <a:srgbClr val="FF0000"/>
+              <a:rPr lang="en-US" altLang="zh-CN" sz="1200">
+                <a:solidFill>
+                  <a:srgbClr val="00B0F0"/>
+                </a:solidFill>
+              </a:rPr>
+              <a:t>    Met:https://github.com/karmadaio/community/blob/main/GOVERNANCE.md</a:t>
+            </a:r>
+            <a:r>
+              <a:rPr lang="zh-CN" altLang="en-US" sz="1200">
+                <a:solidFill>
+                  <a:srgbClr val="00B0F0"/>
                 </a:solidFill>
               </a:rPr>
               <a:t>这里包含了</a:t>
@@ -9810,7 +9906,7 @@
             <a:r>
               <a:rPr lang="en-US" altLang="zh-CN" sz="1200">
                 <a:solidFill>
-                  <a:srgbClr val="FF0000"/>
+                  <a:srgbClr val="00B0F0"/>
                 </a:solidFill>
               </a:rPr>
               <a:t>karmada</a:t>
@@ -9818,7 +9914,7 @@
             <a:r>
               <a:rPr lang="zh-CN" altLang="en-US" sz="1200">
                 <a:solidFill>
-                  <a:srgbClr val="FF0000"/>
+                  <a:srgbClr val="00B0F0"/>
                 </a:solidFill>
               </a:rPr>
               <a:t>项目的</a:t>
@@ -9826,7 +9922,7 @@
             <a:r>
               <a:rPr lang="en-US" altLang="zh-CN" sz="1200">
                 <a:solidFill>
-                  <a:srgbClr val="FF0000"/>
+                  <a:srgbClr val="00B0F0"/>
                 </a:solidFill>
               </a:rPr>
               <a:t>Values</a:t>
@@ -9834,7 +9930,7 @@
             <a:r>
               <a:rPr lang="zh-CN" altLang="en-US" sz="1200">
                 <a:solidFill>
-                  <a:srgbClr val="FF0000"/>
+                  <a:srgbClr val="00B0F0"/>
                 </a:solidFill>
               </a:rPr>
               <a:t>，</a:t>
@@ -9842,7 +9938,7 @@
             <a:r>
               <a:rPr lang="en-US" altLang="zh-CN" sz="1200">
                 <a:solidFill>
-                  <a:srgbClr val="FF0000"/>
+                  <a:srgbClr val="00B0F0"/>
                 </a:solidFill>
               </a:rPr>
               <a:t>Membership</a:t>
@@ -9850,7 +9946,7 @@
             <a:r>
               <a:rPr lang="zh-CN" altLang="en-US" sz="1200">
                 <a:solidFill>
-                  <a:srgbClr val="FF0000"/>
+                  <a:srgbClr val="00B0F0"/>
                 </a:solidFill>
               </a:rPr>
               <a:t>，</a:t>
@@ -9858,7 +9954,7 @@
             <a:r>
               <a:rPr lang="en-US" altLang="zh-CN" sz="1200">
                 <a:solidFill>
-                  <a:srgbClr val="FF0000"/>
+                  <a:srgbClr val="00B0F0"/>
                 </a:solidFill>
               </a:rPr>
               <a:t>Meetings</a:t>
@@ -9866,7 +9962,7 @@
             <a:r>
               <a:rPr lang="zh-CN" altLang="en-US" sz="1200">
                 <a:solidFill>
-                  <a:srgbClr val="FF0000"/>
+                  <a:srgbClr val="00B0F0"/>
                 </a:solidFill>
               </a:rPr>
               <a:t>，</a:t>
@@ -9874,7 +9970,7 @@
             <a:r>
               <a:rPr lang="en-US" altLang="zh-CN" sz="1200">
                 <a:solidFill>
-                  <a:srgbClr val="FF0000"/>
+                  <a:srgbClr val="00B0F0"/>
                 </a:solidFill>
               </a:rPr>
               <a:t>CNCF Resources</a:t>
@@ -9882,7 +9978,7 @@
             <a:r>
               <a:rPr lang="zh-CN" altLang="en-US" sz="1200">
                 <a:solidFill>
-                  <a:srgbClr val="FF0000"/>
+                  <a:srgbClr val="00B0F0"/>
                 </a:solidFill>
               </a:rPr>
               <a:t>，</a:t>
@@ -9890,7 +9986,7 @@
             <a:r>
               <a:rPr lang="en-US" altLang="zh-CN" sz="1200">
                 <a:solidFill>
-                  <a:srgbClr val="FF0000"/>
+                  <a:srgbClr val="00B0F0"/>
                 </a:solidFill>
               </a:rPr>
               <a:t>Code of Conduct Enforcement</a:t>
@@ -9898,7 +9994,7 @@
             <a:r>
               <a:rPr lang="zh-CN" altLang="en-US" sz="1200">
                 <a:solidFill>
-                  <a:srgbClr val="FF0000"/>
+                  <a:srgbClr val="00B0F0"/>
                 </a:solidFill>
               </a:rPr>
               <a:t>，</a:t>
@@ -9906,7 +10002,7 @@
             <a:r>
               <a:rPr lang="en-US" altLang="zh-CN" sz="1200">
                 <a:solidFill>
-                  <a:srgbClr val="FF0000"/>
+                  <a:srgbClr val="00B0F0"/>
                 </a:solidFill>
               </a:rPr>
               <a:t>Security Response Team</a:t>
@@ -9914,7 +10010,7 @@
             <a:r>
               <a:rPr lang="zh-CN" altLang="en-US" sz="1200">
                 <a:solidFill>
-                  <a:srgbClr val="FF0000"/>
+                  <a:srgbClr val="00B0F0"/>
                 </a:solidFill>
               </a:rPr>
               <a:t>，</a:t>
@@ -9922,7 +10018,7 @@
             <a:r>
               <a:rPr lang="en-US" altLang="zh-CN" sz="1200">
                 <a:solidFill>
-                  <a:srgbClr val="FF0000"/>
+                  <a:srgbClr val="00B0F0"/>
                 </a:solidFill>
               </a:rPr>
               <a:t>Voting</a:t>
@@ -9930,7 +10026,7 @@
             <a:r>
               <a:rPr lang="zh-CN" altLang="en-US" sz="1200">
                 <a:solidFill>
-                  <a:srgbClr val="FF0000"/>
+                  <a:srgbClr val="00B0F0"/>
                 </a:solidFill>
               </a:rPr>
               <a:t>，</a:t>
@@ -9938,14 +10034,14 @@
             <a:r>
               <a:rPr lang="en-US" altLang="zh-CN" sz="1200">
                 <a:solidFill>
-                  <a:srgbClr val="FF0000"/>
+                  <a:srgbClr val="00B0F0"/>
                 </a:solidFill>
               </a:rPr>
               <a:t>Modifications</a:t>
             </a:r>
             <a:endParaRPr lang="en-US" altLang="zh-CN" sz="1200">
               <a:solidFill>
-                <a:srgbClr val="FF0000"/>
+                <a:srgbClr val="00B0F0"/>
               </a:solidFill>
             </a:endParaRPr>
           </a:p>
@@ -10007,18 +10103,34 @@
               <a:buChar char="•"/>
             </a:pPr>
             <a:r>
-              <a:rPr lang="en-US" altLang="zh-CN" sz="1200"/>
+              <a:rPr lang="en-US" altLang="zh-CN" sz="1200">
+                <a:solidFill>
+                  <a:srgbClr val="00B0F0"/>
+                </a:solidFill>
+              </a:rPr>
               <a:t>MUST </a:t>
             </a:r>
             <a:r>
-              <a:rPr lang="zh-CN" altLang="en-US" sz="1200"/>
+              <a:rPr lang="zh-CN" altLang="en-US" sz="1200">
+                <a:solidFill>
+                  <a:srgbClr val="00B0F0"/>
+                </a:solidFill>
+              </a:rPr>
               <a:t>类别：该项目必须采取行为守则，并将其发布在标准的位置。 (需要网址) [</a:t>
             </a:r>
             <a:r>
-              <a:rPr lang="en-US" altLang="zh-CN" sz="1200"/>
+              <a:rPr lang="en-US" altLang="zh-CN" sz="1200">
+                <a:solidFill>
+                  <a:srgbClr val="00B0F0"/>
+                </a:solidFill>
+              </a:rPr>
               <a:t>code_of_conduct]    </a:t>
             </a:r>
-            <a:endParaRPr lang="en-US" altLang="zh-CN" sz="1200"/>
+            <a:endParaRPr lang="en-US" altLang="zh-CN" sz="1200">
+              <a:solidFill>
+                <a:srgbClr val="00B0F0"/>
+              </a:solidFill>
+            </a:endParaRPr>
           </a:p>
           <a:p>
             <a:pPr marL="285750" indent="-285750">
@@ -10028,7 +10140,7 @@
             <a:r>
               <a:rPr lang="en-US" altLang="zh-CN" sz="1200">
                 <a:solidFill>
-                  <a:srgbClr val="FF0000"/>
+                  <a:srgbClr val="00B0F0"/>
                 </a:solidFill>
               </a:rPr>
               <a:t>Met:</a:t>
@@ -10036,7 +10148,7 @@
             <a:r>
               <a:rPr lang="zh-CN" altLang="en-US" sz="1200">
                 <a:solidFill>
-                  <a:srgbClr val="FF0000"/>
+                  <a:srgbClr val="00B0F0"/>
                 </a:solidFill>
               </a:rPr>
               <a:t> 主仓库根目录标准位置存在</a:t>
@@ -10044,7 +10156,7 @@
             <a:r>
               <a:rPr lang="en-US" altLang="zh-CN" sz="1200">
                 <a:solidFill>
-                  <a:srgbClr val="FF0000"/>
+                  <a:srgbClr val="00B0F0"/>
                 </a:solidFill>
               </a:rPr>
               <a:t>CODE_OF_CONDUCT.md </a:t>
@@ -10052,7 +10164,7 @@
             <a:r>
               <a:rPr lang="zh-CN" altLang="en-US" sz="1200">
                 <a:solidFill>
-                  <a:srgbClr val="FF0000"/>
+                  <a:srgbClr val="00B0F0"/>
                 </a:solidFill>
               </a:rPr>
               <a:t>与</a:t>
@@ -10060,7 +10172,7 @@
             <a:r>
               <a:rPr lang="en-US" altLang="zh-CN" sz="1200">
                 <a:solidFill>
-                  <a:srgbClr val="FF0000"/>
+                  <a:srgbClr val="00B0F0"/>
                 </a:solidFill>
               </a:rPr>
               <a:t>   GOVERNANCE.md </a:t>
@@ -10068,7 +10180,7 @@
             <a:r>
               <a:rPr lang="zh-CN" altLang="en-US" sz="1200">
                 <a:solidFill>
-                  <a:srgbClr val="FF0000"/>
+                  <a:srgbClr val="00B0F0"/>
                 </a:solidFill>
               </a:rPr>
               <a:t>均链接引用。</a:t>
@@ -10076,14 +10188,14 @@
             <a:r>
               <a:rPr lang="en-US" altLang="zh-CN" sz="1200">
                 <a:solidFill>
-                  <a:srgbClr val="FF0000"/>
+                  <a:srgbClr val="00B0F0"/>
                 </a:solidFill>
               </a:rPr>
               <a:t>https://github.com/karmada-io/karmada/blob/master/CODE_OF_CONDUCT.md</a:t>
             </a:r>
             <a:endParaRPr lang="en-US" altLang="zh-CN" sz="1200">
               <a:solidFill>
-                <a:srgbClr val="FF0000"/>
+                <a:srgbClr val="00B0F0"/>
               </a:solidFill>
             </a:endParaRPr>
           </a:p>
@@ -10145,14 +10257,26 @@
               <a:buChar char="•"/>
             </a:pPr>
             <a:r>
-              <a:rPr lang="en-US" altLang="zh-CN" sz="1200"/>
+              <a:rPr lang="en-US" altLang="zh-CN" sz="1200">
+                <a:solidFill>
+                  <a:srgbClr val="00B0F0"/>
+                </a:solidFill>
+              </a:rPr>
               <a:t>MUST </a:t>
             </a:r>
             <a:r>
-              <a:rPr lang="zh-CN" altLang="en-US" sz="1200"/>
+              <a:rPr lang="zh-CN" altLang="en-US" sz="1200">
+                <a:solidFill>
+                  <a:srgbClr val="00B0F0"/>
+                </a:solidFill>
+              </a:rPr>
               <a:t>类别：该项目必须公开了具体人员与职责范围</a:t>
             </a:r>
-            <a:endParaRPr lang="zh-CN" altLang="en-US" sz="1200"/>
+            <a:endParaRPr lang="zh-CN" altLang="en-US" sz="1200">
+              <a:solidFill>
+                <a:srgbClr val="00B0F0"/>
+              </a:solidFill>
+            </a:endParaRPr>
           </a:p>
           <a:p>
             <a:pPr marL="285750" indent="-285750">
@@ -10162,7 +10286,7 @@
             <a:r>
               <a:rPr lang="en-US" altLang="zh-CN" sz="1200">
                 <a:solidFill>
-                  <a:srgbClr val="FF0000"/>
+                  <a:srgbClr val="00B0F0"/>
                 </a:solidFill>
               </a:rPr>
               <a:t>Met:</a:t>
@@ -10170,7 +10294,7 @@
             <a:r>
               <a:rPr lang="zh-CN" altLang="en-US" sz="1200">
                 <a:solidFill>
-                  <a:srgbClr val="FF0000"/>
+                  <a:srgbClr val="00B0F0"/>
                 </a:solidFill>
               </a:rPr>
               <a:t> </a:t>
@@ -10178,7 +10302,7 @@
             <a:r>
               <a:rPr lang="en-US" altLang="zh-CN" sz="1200">
                 <a:solidFill>
-                  <a:srgbClr val="FF0000"/>
+                  <a:srgbClr val="00B0F0"/>
                 </a:solidFill>
               </a:rPr>
               <a:t>community-membership.md </a:t>
@@ -10186,7 +10310,7 @@
             <a:r>
               <a:rPr lang="zh-CN" altLang="en-US" sz="1200">
                 <a:solidFill>
-                  <a:srgbClr val="FF0000"/>
+                  <a:srgbClr val="00B0F0"/>
                 </a:solidFill>
               </a:rPr>
               <a:t>定义 </a:t>
@@ -10194,7 +10318,7 @@
             <a:r>
               <a:rPr lang="en-US" altLang="zh-CN" sz="1200">
                 <a:solidFill>
-                  <a:srgbClr val="FF0000"/>
+                  <a:srgbClr val="00B0F0"/>
                 </a:solidFill>
               </a:rPr>
               <a:t>Member/Reviewer/Approver/Maintainer </a:t>
@@ -10202,7 +10326,7 @@
             <a:r>
               <a:rPr lang="zh-CN" altLang="en-US" sz="1200">
                 <a:solidFill>
-                  <a:srgbClr val="FF0000"/>
+                  <a:srgbClr val="00B0F0"/>
                 </a:solidFill>
               </a:rPr>
               <a:t>的职责、要求与权限；</a:t>
@@ -10210,7 +10334,7 @@
             <a:r>
               <a:rPr lang="en-US" altLang="zh-CN" sz="1200">
                 <a:solidFill>
-                  <a:srgbClr val="FF0000"/>
+                  <a:srgbClr val="00B0F0"/>
                 </a:solidFill>
               </a:rPr>
               <a:t>MAINTAINERS.md、APPROVERS.md、REVIEWERS.md </a:t>
@@ -10218,7 +10342,7 @@
             <a:r>
               <a:rPr lang="zh-CN" altLang="en-US" sz="1200">
                 <a:solidFill>
-                  <a:srgbClr val="FF0000"/>
+                  <a:srgbClr val="00B0F0"/>
                 </a:solidFill>
               </a:rPr>
               <a:t>及仓库 </a:t>
@@ -10226,7 +10350,7 @@
             <a:r>
               <a:rPr lang="en-US" altLang="zh-CN" sz="1200">
                 <a:solidFill>
-                  <a:srgbClr val="FF0000"/>
+                  <a:srgbClr val="00B0F0"/>
                 </a:solidFill>
               </a:rPr>
               <a:t>OWNERS </a:t>
@@ -10234,7 +10358,7 @@
             <a:r>
               <a:rPr lang="zh-CN" altLang="en-US" sz="1200">
                 <a:solidFill>
-                  <a:srgbClr val="FF0000"/>
+                  <a:srgbClr val="00B0F0"/>
                 </a:solidFill>
               </a:rPr>
               <a:t>文件公开了具体人员与职责范围。</a:t>
@@ -10242,14 +10366,14 @@
             <a:r>
               <a:rPr lang="en-US" altLang="zh-CN" sz="1200">
                 <a:solidFill>
-                  <a:srgbClr val="FF0000"/>
+                  <a:srgbClr val="00B0F0"/>
                 </a:solidFill>
               </a:rPr>
               <a:t>https://github.com/karmada-io/community/blob/main/community-membership.md ; https://github.com/karmada-io/community/blob/main/MAINTAINERS.md ; https://github.com/karmada-io/community/blob/main/APPROVERS.md</a:t>
             </a:r>
             <a:endParaRPr lang="en-US" altLang="zh-CN" sz="1200">
               <a:solidFill>
-                <a:srgbClr val="FF0000"/>
+                <a:srgbClr val="00B0F0"/>
               </a:solidFill>
             </a:endParaRPr>
           </a:p>
@@ -10477,26 +10601,42 @@
               <a:buChar char="•"/>
             </a:pPr>
             <a:r>
-              <a:rPr lang="en-US" altLang="zh-CN" sz="1200"/>
+              <a:rPr lang="en-US" altLang="zh-CN" sz="1200">
+                <a:solidFill>
+                  <a:srgbClr val="00B0F0"/>
+                </a:solidFill>
+              </a:rPr>
               <a:t>MUST </a:t>
             </a:r>
             <a:r>
-              <a:rPr lang="zh-CN" altLang="en-US" sz="1200"/>
+              <a:rPr lang="zh-CN" altLang="en-US" sz="1200">
+                <a:solidFill>
+                  <a:srgbClr val="00B0F0"/>
+                </a:solidFill>
+              </a:rPr>
               <a:t>类别：项目需要说明</a:t>
             </a:r>
             <a:r>
-              <a:rPr lang="en-US" altLang="zh-CN" sz="1200"/>
+              <a:rPr lang="en-US" altLang="zh-CN" sz="1200">
+                <a:solidFill>
+                  <a:srgbClr val="00B0F0"/>
+                </a:solidFill>
+              </a:rPr>
               <a:t>bust_factor</a:t>
             </a:r>
             <a:r>
-              <a:rPr lang="zh-CN" altLang="en-US" sz="1200"/>
-              <a:t>是</a:t>
-            </a:r>
-            <a:r>
-              <a:rPr lang="zh-CN" altLang="en-US" sz="1200"/>
-              <a:t>多少</a:t>
-            </a:r>
-            <a:endParaRPr lang="zh-CN" altLang="en-US" sz="1200"/>
+              <a:rPr lang="zh-CN" altLang="en-US" sz="1200">
+                <a:solidFill>
+                  <a:srgbClr val="00B0F0"/>
+                </a:solidFill>
+              </a:rPr>
+              <a:t>是多少</a:t>
+            </a:r>
+            <a:endParaRPr lang="zh-CN" altLang="en-US" sz="1200">
+              <a:solidFill>
+                <a:srgbClr val="00B0F0"/>
+              </a:solidFill>
+            </a:endParaRPr>
           </a:p>
           <a:p>
             <a:pPr marL="285750" indent="-285750">
@@ -10504,22 +10644,34 @@
               <a:buChar char="•"/>
             </a:pPr>
             <a:r>
-              <a:rPr lang="zh-CN" altLang="en-US" sz="1200"/>
+              <a:rPr lang="zh-CN" altLang="en-US" sz="1200">
+                <a:solidFill>
+                  <a:srgbClr val="00B0F0"/>
+                </a:solidFill>
+              </a:rPr>
               <a:t>这个可以通过开源项目</a:t>
             </a:r>
             <a:r>
-              <a:rPr lang="en-US" altLang="zh-CN" sz="1200"/>
+              <a:rPr lang="en-US" altLang="zh-CN" sz="1200">
+                <a:solidFill>
+                  <a:srgbClr val="00B0F0"/>
+                </a:solidFill>
+              </a:rPr>
               <a:t>https://github.com/aserg-ufmg/Truck-Factor</a:t>
             </a:r>
             <a:r>
-              <a:rPr lang="zh-CN" altLang="en-US" sz="1200"/>
-              <a:t>来</a:t>
-            </a:r>
-            <a:r>
-              <a:rPr lang="zh-CN" altLang="en-US" sz="1200"/>
-              <a:t>统计。</a:t>
-            </a:r>
-            <a:endParaRPr lang="zh-CN" altLang="en-US" sz="1200"/>
+              <a:rPr lang="zh-CN" altLang="en-US" sz="1200">
+                <a:solidFill>
+                  <a:srgbClr val="00B0F0"/>
+                </a:solidFill>
+              </a:rPr>
+              <a:t>来统计。</a:t>
+            </a:r>
+            <a:endParaRPr lang="zh-CN" altLang="en-US" sz="1200">
+              <a:solidFill>
+                <a:srgbClr val="00B0F0"/>
+              </a:solidFill>
+            </a:endParaRPr>
           </a:p>
           <a:p>
             <a:pPr marL="285750" indent="-285750">
@@ -10529,7 +10681,7 @@
             <a:r>
               <a:rPr lang="en-US" altLang="zh-CN" sz="1200">
                 <a:solidFill>
-                  <a:srgbClr val="FF0000"/>
+                  <a:srgbClr val="00B0F0"/>
                 </a:solidFill>
               </a:rPr>
               <a:t>Met</a:t>
@@ -10537,7 +10689,7 @@
             <a:r>
               <a:rPr lang="zh-CN" altLang="en-US" sz="1200">
                 <a:solidFill>
-                  <a:srgbClr val="FF0000"/>
+                  <a:srgbClr val="00B0F0"/>
                 </a:solidFill>
               </a:rPr>
               <a:t>： 13 名 </a:t>
@@ -10545,7 +10697,7 @@
             <a:r>
               <a:rPr lang="en-US" altLang="zh-CN" sz="1200">
                 <a:solidFill>
-                  <a:srgbClr val="FF0000"/>
+                  <a:srgbClr val="00B0F0"/>
                 </a:solidFill>
               </a:rPr>
               <a:t>active maintainers </a:t>
@@ -10553,7 +10705,7 @@
             <a:r>
               <a:rPr lang="zh-CN" altLang="en-US" sz="1200">
                 <a:solidFill>
-                  <a:srgbClr val="FF0000"/>
+                  <a:srgbClr val="00B0F0"/>
                 </a:solidFill>
               </a:rPr>
               <a:t>来自华为、</a:t>
@@ -10561,7 +10713,7 @@
             <a:r>
               <a:rPr lang="en-US" altLang="zh-CN" sz="1200">
                 <a:solidFill>
-                  <a:srgbClr val="FF0000"/>
+                  <a:srgbClr val="00B0F0"/>
                 </a:solidFill>
               </a:rPr>
               <a:t>Bloomberg、</a:t>
@@ -10569,7 +10721,7 @@
             <a:r>
               <a:rPr lang="zh-CN" altLang="en-US" sz="1200">
                 <a:solidFill>
-                  <a:srgbClr val="FF0000"/>
+                  <a:srgbClr val="00B0F0"/>
                 </a:solidFill>
               </a:rPr>
               <a:t>字节跳动、阿里云、</a:t>
@@ -10577,7 +10729,7 @@
             <a:r>
               <a:rPr lang="en-US" altLang="zh-CN" sz="1200">
                 <a:solidFill>
-                  <a:srgbClr val="FF0000"/>
+                  <a:srgbClr val="00B0F0"/>
                 </a:solidFill>
               </a:rPr>
               <a:t>DaoCloud、CECloud、Trip.com </a:t>
@@ -10585,7 +10737,7 @@
             <a:r>
               <a:rPr lang="zh-CN" altLang="en-US" sz="1200">
                 <a:solidFill>
-                  <a:srgbClr val="FF0000"/>
+                  <a:srgbClr val="00B0F0"/>
                 </a:solidFill>
               </a:rPr>
               <a:t>等多个组织，另有 27 名 </a:t>
@@ -10593,7 +10745,7 @@
             <a:r>
               <a:rPr lang="en-US" altLang="zh-CN" sz="1200">
                 <a:solidFill>
-                  <a:srgbClr val="FF0000"/>
+                  <a:srgbClr val="00B0F0"/>
                 </a:solidFill>
               </a:rPr>
               <a:t>approver；</a:t>
@@ -10601,7 +10753,7 @@
             <a:r>
               <a:rPr lang="zh-CN" altLang="en-US" sz="1200">
                 <a:solidFill>
-                  <a:srgbClr val="FF0000"/>
+                  <a:srgbClr val="00B0F0"/>
                 </a:solidFill>
               </a:rPr>
               <a:t>单一组织或单一个人无法阻塞 </a:t>
@@ -10609,7 +10761,7 @@
             <a:r>
               <a:rPr lang="en-US" altLang="zh-CN" sz="1200">
                 <a:solidFill>
-                  <a:srgbClr val="FF0000"/>
+                  <a:srgbClr val="00B0F0"/>
                 </a:solidFill>
               </a:rPr>
               <a:t>issue/PR/</a:t>
@@ -10617,7 +10769,7 @@
             <a:r>
               <a:rPr lang="zh-CN" altLang="en-US" sz="1200">
                 <a:solidFill>
-                  <a:srgbClr val="FF0000"/>
+                  <a:srgbClr val="00B0F0"/>
                 </a:solidFill>
               </a:rPr>
               <a:t>发布。</a:t>
@@ -10625,14 +10777,14 @@
             <a:r>
               <a:rPr lang="en-US" altLang="zh-CN" sz="1200">
                 <a:solidFill>
-                  <a:srgbClr val="FF0000"/>
+                  <a:srgbClr val="00B0F0"/>
                 </a:solidFill>
               </a:rPr>
               <a:t>https://github.com/karmada-io/community/blob/main/MAINTAINERS.md ; https://github.com/karmada-io/community/blob/main/APPROVERS.md</a:t>
             </a:r>
             <a:endParaRPr lang="en-US" altLang="zh-CN" sz="1200">
               <a:solidFill>
-                <a:srgbClr val="FF0000"/>
+                <a:srgbClr val="00B0F0"/>
               </a:solidFill>
             </a:endParaRPr>
           </a:p>
@@ -10868,8 +11020,8 @@
         </p:nvSpPr>
         <p:spPr>
           <a:xfrm>
-            <a:off x="6644005" y="113030"/>
-            <a:ext cx="5500370" cy="1962785"/>
+            <a:off x="6691630" y="1228090"/>
+            <a:ext cx="5500370" cy="835025"/>
           </a:xfrm>
           <a:prstGeom prst="rect">
             <a:avLst/>
@@ -10886,18 +11038,26 @@
               <a:buChar char="•"/>
             </a:pPr>
             <a:r>
-              <a:rPr lang="en-US" altLang="zh-CN" sz="1200"/>
+              <a:rPr lang="en-US" altLang="zh-CN" sz="1200">
+                <a:solidFill>
+                  <a:srgbClr val="00B0F0"/>
+                </a:solidFill>
+              </a:rPr>
               <a:t>must </a:t>
             </a:r>
             <a:r>
-              <a:rPr lang="zh-CN" altLang="en-US" sz="1200"/>
-              <a:t>类别：要求项目有一个描述未来一年计划的</a:t>
-            </a:r>
-            <a:r>
-              <a:rPr lang="zh-CN" altLang="en-US" sz="1200"/>
-              <a:t>文档，</a:t>
-            </a:r>
-            <a:endParaRPr lang="zh-CN" altLang="en-US" sz="1200"/>
+              <a:rPr lang="zh-CN" altLang="en-US" sz="1200">
+                <a:solidFill>
+                  <a:srgbClr val="00B0F0"/>
+                </a:solidFill>
+              </a:rPr>
+              <a:t>类别：要求项目有一个描述未来一年计划的文档，</a:t>
+            </a:r>
+            <a:endParaRPr lang="zh-CN" altLang="en-US" sz="1200">
+              <a:solidFill>
+                <a:srgbClr val="00B0F0"/>
+              </a:solidFill>
+            </a:endParaRPr>
           </a:p>
           <a:p>
             <a:pPr marL="285750" indent="-285750">
@@ -10906,7 +11066,7 @@
             </a:pPr>
             <a:endParaRPr lang="zh-CN" altLang="en-US" sz="1200">
               <a:solidFill>
-                <a:srgbClr val="FF0000"/>
+                <a:srgbClr val="00B0F0"/>
               </a:solidFill>
             </a:endParaRPr>
           </a:p>
@@ -10918,86 +11078,14 @@
             <a:r>
               <a:rPr lang="en-US" altLang="zh-CN" sz="1200">
                 <a:solidFill>
-                  <a:srgbClr val="FF0000"/>
-                </a:solidFill>
-              </a:rPr>
-              <a:t>Unmet: https://github.com/karmadaio/community/blob/main/ROADMAP.md </a:t>
-            </a:r>
-            <a:r>
-              <a:rPr lang="zh-CN" altLang="en-US" sz="1200">
-                <a:solidFill>
-                  <a:srgbClr val="FF0000"/>
-                </a:solidFill>
-              </a:rPr>
-              <a:t>目前仅描述“2026 </a:t>
-            </a:r>
-            <a:r>
-              <a:rPr lang="en-US" altLang="zh-CN" sz="1200">
-                <a:solidFill>
-                  <a:srgbClr val="FF0000"/>
-                </a:solidFill>
-              </a:rPr>
-              <a:t>feature plan”；</a:t>
-            </a:r>
-            <a:r>
-              <a:rPr lang="zh-CN" altLang="en-US" sz="1200">
-                <a:solidFill>
-                  <a:srgbClr val="FF0000"/>
-                </a:solidFill>
-              </a:rPr>
-              <a:t>以 2026-08-19 为审计日，其时间范围不足未来一整年，也未明确写出“不做什么”的边界，</a:t>
-            </a:r>
-            <a:r>
-              <a:rPr lang="en-US" altLang="zh-CN" sz="1200">
-                <a:solidFill>
-                  <a:srgbClr val="FF0000"/>
-                </a:solidFill>
-              </a:rPr>
-              <a:t>Pending </a:t>
-            </a:r>
-            <a:r>
-              <a:rPr lang="zh-CN" altLang="en-US" sz="1200">
-                <a:solidFill>
-                  <a:srgbClr val="FF0000"/>
-                </a:solidFill>
-              </a:rPr>
-              <a:t>列表不能替代带时间范围的路线图。</a:t>
-            </a:r>
-            <a:r>
-              <a:rPr lang="en-US" altLang="zh-CN" sz="1200">
-                <a:solidFill>
-                  <a:srgbClr val="FF0000"/>
-                </a:solidFill>
-              </a:rPr>
-              <a:t>https://github.com/karmada-io/community/blob/main/ROADMAP.md [improvement]: </a:t>
-            </a:r>
-            <a:r>
-              <a:rPr lang="zh-CN" altLang="en-US" sz="1200">
-                <a:solidFill>
-                  <a:srgbClr val="FF0000"/>
-                </a:solidFill>
-              </a:rPr>
-              <a:t>将 </a:t>
-            </a:r>
-            <a:r>
-              <a:rPr lang="en-US" altLang="zh-CN" sz="1200">
-                <a:solidFill>
-                  <a:srgbClr val="FF0000"/>
-                </a:solidFill>
-              </a:rPr>
-              <a:t>community/ROADMAP.md </a:t>
-            </a:r>
-            <a:r>
-              <a:rPr lang="zh-CN" altLang="en-US" sz="1200">
-                <a:solidFill>
-                  <a:srgbClr val="FF0000"/>
-                </a:solidFill>
-              </a:rPr>
-              <a:t>更新为覆盖审计日起至少一整年（至 2027-08 及以后）的分阶段计划，为每项计划写明时间窗与优先级，并明确列出排除在范围之外的工作。</a:t>
-            </a:r>
-            <a:endParaRPr lang="zh-CN" altLang="en-US" sz="1200">
+                  <a:srgbClr val="00B0F0"/>
+                </a:solidFill>
+              </a:rPr>
+              <a:t>Met: https://github.com/karmadaio/community/blob/main/ROADMAP.md </a:t>
+            </a:r>
+            <a:endParaRPr lang="en-US" altLang="zh-CN" sz="1200">
               <a:solidFill>
-                <a:srgbClr val="FF0000"/>
+                <a:srgbClr val="00B0F0"/>
               </a:solidFill>
             </a:endParaRPr>
           </a:p>
@@ -11029,22 +11117,26 @@
               <a:buChar char="•"/>
             </a:pPr>
             <a:r>
-              <a:rPr lang="en-US" altLang="zh-CN" sz="1200"/>
+              <a:rPr lang="en-US" altLang="zh-CN" sz="1200">
+                <a:solidFill>
+                  <a:srgbClr val="00B0F0"/>
+                </a:solidFill>
+              </a:rPr>
               <a:t>must </a:t>
             </a:r>
             <a:r>
-              <a:rPr lang="zh-CN" altLang="en-US" sz="1200"/>
-              <a:t>类别：要求项目有一个描述软件</a:t>
-            </a:r>
-            <a:r>
-              <a:rPr lang="zh-CN" altLang="en-US" sz="1200"/>
-              <a:t>架构的</a:t>
-            </a:r>
-            <a:r>
-              <a:rPr lang="zh-CN" altLang="en-US" sz="1200"/>
-              <a:t>文档，</a:t>
-            </a:r>
-            <a:endParaRPr lang="zh-CN" altLang="en-US" sz="1200"/>
+              <a:rPr lang="zh-CN" altLang="en-US" sz="1200">
+                <a:solidFill>
+                  <a:srgbClr val="00B0F0"/>
+                </a:solidFill>
+              </a:rPr>
+              <a:t>类别：要求项目有一个描述软件架构的文档，</a:t>
+            </a:r>
+            <a:endParaRPr lang="zh-CN" altLang="en-US" sz="1200">
+              <a:solidFill>
+                <a:srgbClr val="00B0F0"/>
+              </a:solidFill>
+            </a:endParaRPr>
           </a:p>
           <a:p>
             <a:pPr marL="285750" indent="-285750">
@@ -11053,7 +11145,7 @@
             </a:pPr>
             <a:endParaRPr lang="zh-CN" altLang="en-US" sz="1200">
               <a:solidFill>
-                <a:srgbClr val="FF0000"/>
+                <a:srgbClr val="00B0F0"/>
               </a:solidFill>
             </a:endParaRPr>
           </a:p>
@@ -11065,7 +11157,7 @@
             <a:r>
               <a:rPr lang="en-US" altLang="zh-CN" sz="1200">
                 <a:solidFill>
-                  <a:srgbClr val="FF0000"/>
+                  <a:srgbClr val="00B0F0"/>
                 </a:solidFill>
               </a:rPr>
               <a:t>Met: README </a:t>
@@ -11073,7 +11165,7 @@
             <a:r>
               <a:rPr lang="zh-CN" altLang="en-US" sz="1200">
                 <a:solidFill>
-                  <a:srgbClr val="FF0000"/>
+                  <a:srgbClr val="00B0F0"/>
                 </a:solidFill>
               </a:rPr>
               <a:t>提供架构图并说明控制面组件（</a:t>
@@ -11081,7 +11173,7 @@
             <a:r>
               <a:rPr lang="en-US" altLang="zh-CN" sz="1200">
                 <a:solidFill>
-                  <a:srgbClr val="FF0000"/>
+                  <a:srgbClr val="00B0F0"/>
                 </a:solidFill>
               </a:rPr>
               <a:t>API Server、Controller Manager、Scheduler、ETCD </a:t>
@@ -11089,7 +11181,7 @@
             <a:r>
               <a:rPr lang="zh-CN" altLang="en-US" sz="1200">
                 <a:solidFill>
-                  <a:srgbClr val="FF0000"/>
+                  <a:srgbClr val="00B0F0"/>
                 </a:solidFill>
               </a:rPr>
               <a:t>等）；官网 </a:t>
@@ -11097,7 +11189,7 @@
             <a:r>
               <a:rPr lang="en-US" altLang="zh-CN" sz="1200">
                 <a:solidFill>
-                  <a:srgbClr val="FF0000"/>
+                  <a:srgbClr val="00B0F0"/>
                 </a:solidFill>
               </a:rPr>
               <a:t>core-concepts/architecture </a:t>
@@ -11105,7 +11197,7 @@
             <a:r>
               <a:rPr lang="zh-CN" altLang="en-US" sz="1200">
                 <a:solidFill>
-                  <a:srgbClr val="FF0000"/>
+                  <a:srgbClr val="00B0F0"/>
                 </a:solidFill>
               </a:rPr>
               <a:t>与 </a:t>
@@ -11113,7 +11205,7 @@
             <a:r>
               <a:rPr lang="en-US" altLang="zh-CN" sz="1200">
                 <a:solidFill>
-                  <a:srgbClr val="FF0000"/>
+                  <a:srgbClr val="00B0F0"/>
                 </a:solidFill>
               </a:rPr>
               <a:t>security self-assessment </a:t>
@@ -11121,7 +11213,7 @@
             <a:r>
               <a:rPr lang="zh-CN" altLang="en-US" sz="1200">
                 <a:solidFill>
-                  <a:srgbClr val="FF0000"/>
+                  <a:srgbClr val="00B0F0"/>
                 </a:solidFill>
               </a:rPr>
               <a:t>详述 </a:t>
@@ -11129,7 +11221,7 @@
             <a:r>
               <a:rPr lang="en-US" altLang="zh-CN" sz="1200">
                 <a:solidFill>
-                  <a:srgbClr val="FF0000"/>
+                  <a:srgbClr val="00B0F0"/>
                 </a:solidFill>
               </a:rPr>
               <a:t>Host/Member Cluster、Push/Pull </a:t>
@@ -11137,7 +11229,7 @@
             <a:r>
               <a:rPr lang="zh-CN" altLang="en-US" sz="1200">
                 <a:solidFill>
-                  <a:srgbClr val="FF0000"/>
+                  <a:srgbClr val="00B0F0"/>
                 </a:solidFill>
               </a:rPr>
               <a:t>模式、组件关系与数据流。</a:t>
@@ -11145,14 +11237,14 @@
             <a:r>
               <a:rPr lang="en-US" altLang="zh-CN" sz="1200">
                 <a:solidFill>
-                  <a:srgbClr val="FF0000"/>
+                  <a:srgbClr val="00B0F0"/>
                 </a:solidFill>
               </a:rPr>
               <a:t>https://github.com/karmada-io/karmada/blob/master/README.md ; https://karmada.io/docs/core-concepts/architecture/ ; https://github.com/karmada-io/community/blob/main/security-team/assessments/self-assessment.md</a:t>
             </a:r>
             <a:endParaRPr lang="en-US" altLang="zh-CN" sz="1200">
               <a:solidFill>
-                <a:srgbClr val="FF0000"/>
+                <a:srgbClr val="00B0F0"/>
               </a:solidFill>
             </a:endParaRPr>
           </a:p>
@@ -11810,23 +11902,42 @@
             </a:pPr>
             <a:r>
               <a:rPr lang="en-US" altLang="zh-CN" sz="1200">
+                <a:solidFill>
+                  <a:srgbClr val="00B0F0"/>
+                </a:solidFill>
                 <a:sym typeface="+mn-ea"/>
               </a:rPr>
               <a:t>MUST </a:t>
             </a:r>
             <a:r>
-              <a:rPr lang="zh-CN" altLang="en-US" sz="1200"/>
+              <a:rPr lang="zh-CN" altLang="en-US" sz="1200">
+                <a:solidFill>
+                  <a:srgbClr val="00B0F0"/>
+                </a:solidFill>
+              </a:rPr>
               <a:t>类别：要求项目有一个对新手的</a:t>
             </a:r>
             <a:r>
-              <a:rPr lang="en-US" altLang="zh-CN" sz="1200"/>
+              <a:rPr lang="en-US" altLang="zh-CN" sz="1200">
+                <a:solidFill>
+                  <a:srgbClr val="00B0F0"/>
+                </a:solidFill>
+              </a:rPr>
               <a:t>quick start</a:t>
             </a:r>
             <a:r>
-              <a:rPr lang="zh-CN" altLang="en-US" sz="1200"/>
+              <a:rPr lang="zh-CN" altLang="en-US" sz="1200">
+                <a:solidFill>
+                  <a:srgbClr val="00B0F0"/>
+                </a:solidFill>
+              </a:rPr>
               <a:t>指引。</a:t>
             </a:r>
-            <a:endParaRPr lang="zh-CN" altLang="en-US" sz="1200"/>
+            <a:endParaRPr lang="zh-CN" altLang="en-US" sz="1200">
+              <a:solidFill>
+                <a:srgbClr val="00B0F0"/>
+              </a:solidFill>
+            </a:endParaRPr>
           </a:p>
           <a:p>
             <a:pPr marL="285750" indent="-285750">
@@ -11836,7 +11947,7 @@
             <a:r>
               <a:rPr lang="en-US" altLang="zh-CN" sz="1200">
                 <a:solidFill>
-                  <a:srgbClr val="FF0000"/>
+                  <a:srgbClr val="00B0F0"/>
                 </a:solidFill>
               </a:rPr>
               <a:t>Met</a:t>
@@ -11844,7 +11955,7 @@
             <a:r>
               <a:rPr lang="zh-CN" altLang="en-US" sz="1200">
                 <a:solidFill>
-                  <a:srgbClr val="FF0000"/>
+                  <a:srgbClr val="00B0F0"/>
                 </a:solidFill>
               </a:rPr>
               <a:t>：</a:t>
@@ -11852,7 +11963,7 @@
             <a:r>
               <a:rPr lang="en-US" altLang="zh-CN" sz="1200">
                 <a:solidFill>
-                  <a:srgbClr val="FF0000"/>
+                  <a:srgbClr val="00B0F0"/>
                 </a:solidFill>
               </a:rPr>
               <a:t>README </a:t>
@@ -11860,7 +11971,7 @@
             <a:r>
               <a:rPr lang="zh-CN" altLang="en-US" sz="1200">
                 <a:solidFill>
-                  <a:srgbClr val="FF0000"/>
+                  <a:srgbClr val="00B0F0"/>
                 </a:solidFill>
               </a:rPr>
               <a:t>提供 </a:t>
@@ -11868,7 +11979,7 @@
             <a:r>
               <a:rPr lang="en-US" altLang="zh-CN" sz="1200">
                 <a:solidFill>
-                  <a:srgbClr val="FF0000"/>
+                  <a:srgbClr val="00B0F0"/>
                 </a:solidFill>
               </a:rPr>
               <a:t>Quick Start（hack/local-up-karmada.sh </a:t>
@@ -11876,7 +11987,7 @@
             <a:r>
               <a:rPr lang="zh-CN" altLang="en-US" sz="1200">
                 <a:solidFill>
-                  <a:srgbClr val="FF0000"/>
+                  <a:srgbClr val="00B0F0"/>
                 </a:solidFill>
               </a:rPr>
               <a:t>一键部署 + 示例应用传播），官网 </a:t>
@@ -11884,7 +11995,7 @@
             <a:r>
               <a:rPr lang="en-US" altLang="zh-CN" sz="1200">
                 <a:solidFill>
-                  <a:srgbClr val="FF0000"/>
+                  <a:srgbClr val="00B0F0"/>
                 </a:solidFill>
               </a:rPr>
               <a:t>installation </a:t>
@@ -11892,7 +12003,7 @@
             <a:r>
               <a:rPr lang="zh-CN" altLang="en-US" sz="1200">
                 <a:solidFill>
-                  <a:srgbClr val="FF0000"/>
+                  <a:srgbClr val="00B0F0"/>
                 </a:solidFill>
               </a:rPr>
               <a:t>文档提供 </a:t>
@@ -11900,7 +12011,7 @@
             <a:r>
               <a:rPr lang="en-US" altLang="zh-CN" sz="1200">
                 <a:solidFill>
-                  <a:srgbClr val="FF0000"/>
+                  <a:srgbClr val="00B0F0"/>
                 </a:solidFill>
               </a:rPr>
               <a:t>karmadactl/Helm/Operator </a:t>
@@ -11908,7 +12019,7 @@
             <a:r>
               <a:rPr lang="zh-CN" altLang="en-US" sz="1200">
                 <a:solidFill>
-                  <a:srgbClr val="FF0000"/>
+                  <a:srgbClr val="00B0F0"/>
                 </a:solidFill>
               </a:rPr>
               <a:t>安装步骤。</a:t>
@@ -11916,7 +12027,7 @@
             <a:r>
               <a:rPr lang="en-US" altLang="zh-CN" sz="1200">
                 <a:solidFill>
-                  <a:srgbClr val="FF0000"/>
+                  <a:srgbClr val="00B0F0"/>
                 </a:solidFill>
               </a:rPr>
               <a:t>https://github.com/karmada-io/karmada/blob/master/README.md ; https://karmada.io/docs/installation/</a:t>
@@ -11924,7 +12035,7 @@
             <a:r>
               <a:rPr lang="en-US" altLang="zh-CN" sz="1200">
                 <a:solidFill>
-                  <a:srgbClr val="FF0000"/>
+                  <a:srgbClr val="00B0F0"/>
                 </a:solidFill>
                 <a:sym typeface="+mn-ea"/>
               </a:rPr>
@@ -11932,7 +12043,7 @@
             </a:r>
             <a:endParaRPr lang="en-US" altLang="zh-CN" sz="1200">
               <a:solidFill>
-                <a:srgbClr val="FF0000"/>
+                <a:srgbClr val="00B0F0"/>
               </a:solidFill>
               <a:sym typeface="+mn-ea"/>
             </a:endParaRPr>
@@ -12122,23 +12233,42 @@
             </a:pPr>
             <a:r>
               <a:rPr lang="en-US" altLang="zh-CN" sz="1200">
+                <a:solidFill>
+                  <a:srgbClr val="00B0F0"/>
+                </a:solidFill>
                 <a:sym typeface="+mn-ea"/>
               </a:rPr>
               <a:t>MUST </a:t>
             </a:r>
             <a:r>
-              <a:rPr lang="zh-CN" altLang="en-US" sz="1200"/>
+              <a:rPr lang="zh-CN" altLang="en-US" sz="1200">
+                <a:solidFill>
+                  <a:srgbClr val="00B0F0"/>
+                </a:solidFill>
+              </a:rPr>
               <a:t>类别：要求项目在获取任何成就之后，需要在</a:t>
             </a:r>
             <a:r>
-              <a:rPr lang="en-US" altLang="zh-CN" sz="1200"/>
+              <a:rPr lang="en-US" altLang="zh-CN" sz="1200">
+                <a:solidFill>
+                  <a:srgbClr val="00B0F0"/>
+                </a:solidFill>
+              </a:rPr>
               <a:t>48</a:t>
             </a:r>
             <a:r>
-              <a:rPr lang="zh-CN" altLang="en-US" sz="1200"/>
+              <a:rPr lang="zh-CN" altLang="en-US" sz="1200">
+                <a:solidFill>
+                  <a:srgbClr val="00B0F0"/>
+                </a:solidFill>
+              </a:rPr>
               <a:t>小时之内把成就标识出来。</a:t>
             </a:r>
-            <a:endParaRPr lang="zh-CN" altLang="en-US" sz="1200"/>
+            <a:endParaRPr lang="zh-CN" altLang="en-US" sz="1200">
+              <a:solidFill>
+                <a:srgbClr val="00B0F0"/>
+              </a:solidFill>
+            </a:endParaRPr>
           </a:p>
           <a:p>
             <a:pPr marL="285750" indent="-285750">
@@ -12148,7 +12278,7 @@
             <a:r>
               <a:rPr lang="en-US" altLang="zh-CN" sz="1200">
                 <a:solidFill>
-                  <a:srgbClr val="FF0000"/>
+                  <a:srgbClr val="00B0F0"/>
                 </a:solidFill>
               </a:rPr>
               <a:t>Met</a:t>
@@ -12156,7 +12286,7 @@
             <a:r>
               <a:rPr lang="zh-CN" altLang="en-US" sz="1200">
                 <a:solidFill>
-                  <a:srgbClr val="FF0000"/>
+                  <a:srgbClr val="00B0F0"/>
                 </a:solidFill>
               </a:rPr>
               <a:t>：主仓库 </a:t>
@@ -12164,7 +12294,7 @@
             <a:r>
               <a:rPr lang="en-US" altLang="zh-CN" sz="1200">
                 <a:solidFill>
-                  <a:srgbClr val="FF0000"/>
+                  <a:srgbClr val="00B0F0"/>
                 </a:solidFill>
               </a:rPr>
               <a:t>README </a:t>
@@ -12172,7 +12302,7 @@
             <a:r>
               <a:rPr lang="zh-CN" altLang="en-US" sz="1200">
                 <a:solidFill>
-                  <a:srgbClr val="FF0000"/>
+                  <a:srgbClr val="00B0F0"/>
                 </a:solidFill>
               </a:rPr>
               <a:t>顶部已展示并超链接 </a:t>
@@ -12180,7 +12310,7 @@
             <a:r>
               <a:rPr lang="en-US" altLang="zh-CN" sz="1200">
                 <a:solidFill>
-                  <a:srgbClr val="FF0000"/>
+                  <a:srgbClr val="00B0F0"/>
                 </a:solidFill>
               </a:rPr>
               <a:t>OpenSSF Best Practices </a:t>
@@ -12188,7 +12318,7 @@
             <a:r>
               <a:rPr lang="zh-CN" altLang="en-US" sz="1200">
                 <a:solidFill>
-                  <a:srgbClr val="FF0000"/>
+                  <a:srgbClr val="00B0F0"/>
                 </a:solidFill>
               </a:rPr>
               <a:t>徽章（项目 #5301），另有 </a:t>
@@ -12196,7 +12326,7 @@
             <a:r>
               <a:rPr lang="en-US" altLang="zh-CN" sz="1200">
                 <a:solidFill>
-                  <a:srgbClr val="FF0000"/>
+                  <a:srgbClr val="00B0F0"/>
                 </a:solidFill>
               </a:rPr>
               <a:t>OpenSSF Scorecard、Codecov、FOSSA </a:t>
@@ -12204,7 +12334,7 @@
             <a:r>
               <a:rPr lang="zh-CN" altLang="en-US" sz="1200">
                 <a:solidFill>
-                  <a:srgbClr val="FF0000"/>
+                  <a:srgbClr val="00B0F0"/>
                 </a:solidFill>
               </a:rPr>
               <a:t>等徽章，满足“识别并超链接成就”的要求。</a:t>
@@ -12212,14 +12342,14 @@
             <a:r>
               <a:rPr lang="en-US" altLang="zh-CN" sz="1200">
                 <a:solidFill>
-                  <a:srgbClr val="FF0000"/>
+                  <a:srgbClr val="00B0F0"/>
                 </a:solidFill>
               </a:rPr>
               <a:t>https://github.com/karmada-io/karmada/blob/master/README.md ;   https://www.bestpractices.dev/en/projects/5301</a:t>
             </a:r>
             <a:endParaRPr lang="en-US" altLang="zh-CN" sz="1200">
               <a:solidFill>
-                <a:srgbClr val="FF0000"/>
+                <a:srgbClr val="00B0F0"/>
               </a:solidFill>
             </a:endParaRPr>
           </a:p>
@@ -12386,35 +12516,58 @@
             </a:pPr>
             <a:r>
               <a:rPr lang="en-US" altLang="zh-CN" sz="1200">
+                <a:solidFill>
+                  <a:srgbClr val="00B0F0"/>
+                </a:solidFill>
                 <a:sym typeface="+mn-ea"/>
               </a:rPr>
               <a:t>Should</a:t>
             </a:r>
             <a:r>
-              <a:rPr lang="zh-CN" altLang="en-US" sz="1200"/>
+              <a:rPr lang="zh-CN" altLang="en-US" sz="1200">
+                <a:solidFill>
+                  <a:srgbClr val="00B0F0"/>
+                </a:solidFill>
+              </a:rPr>
               <a:t>类别：要求项目是国际化的，允许用户根据自己的文化进行本地化。</a:t>
             </a:r>
             <a:r>
-              <a:rPr lang="en-US" altLang="zh-CN" sz="1200"/>
+              <a:rPr lang="en-US" altLang="zh-CN" sz="1200">
+                <a:solidFill>
+                  <a:srgbClr val="00B0F0"/>
+                </a:solidFill>
+              </a:rPr>
               <a:t>“</a:t>
             </a:r>
             <a:r>
-              <a:rPr lang="zh-CN" altLang="en-US" sz="1200"/>
+              <a:rPr lang="zh-CN" altLang="en-US" sz="1200">
+                <a:solidFill>
+                  <a:srgbClr val="00B0F0"/>
+                </a:solidFill>
+              </a:rPr>
               <a:t>本地化</a:t>
             </a:r>
             <a:r>
-              <a:rPr lang="en-US" altLang="zh-CN" sz="1200"/>
+              <a:rPr lang="en-US" altLang="zh-CN" sz="1200">
+                <a:solidFill>
+                  <a:srgbClr val="00B0F0"/>
+                </a:solidFill>
+              </a:rPr>
               <a:t>”</a:t>
             </a:r>
             <a:r>
-              <a:rPr lang="zh-CN" altLang="en-US" sz="1200"/>
+              <a:rPr lang="zh-CN" altLang="en-US" sz="1200">
+                <a:solidFill>
+                  <a:srgbClr val="00B0F0"/>
+                </a:solidFill>
+              </a:rPr>
               <a:t>解释见图。</a:t>
             </a:r>
-            <a:r>
-              <a:rPr lang="en-US" altLang="zh-CN" sz="1200"/>
-              <a:t>		</a:t>
-            </a:r>
-            <a:endParaRPr lang="zh-CN" altLang="en-US" sz="1200"/>
+            <a:endParaRPr lang="zh-CN" altLang="en-US" sz="1200">
+              <a:solidFill>
+                <a:srgbClr val="00B0F0"/>
+              </a:solidFill>
+            </a:endParaRPr>
           </a:p>
           <a:p>
             <a:pPr marL="285750" indent="-285750">
@@ -12424,147 +12577,39 @@
             <a:r>
               <a:rPr lang="en-US" altLang="zh-CN" sz="1200">
                 <a:solidFill>
-                  <a:srgbClr val="FF0000"/>
-                </a:solidFill>
-              </a:rPr>
-              <a:t>Unmet</a:t>
-            </a:r>
-            <a:r>
-              <a:rPr lang="zh-CN" altLang="en-US" sz="1200">
-                <a:solidFill>
-                  <a:srgbClr val="FF0000"/>
-                </a:solidFill>
-              </a:rPr>
-              <a:t>：网已做 </a:t>
-            </a:r>
-            <a:r>
-              <a:rPr lang="en-US" altLang="zh-CN" sz="1200">
-                <a:solidFill>
-                  <a:srgbClr val="FF0000"/>
-                </a:solidFill>
-              </a:rPr>
-              <a:t>i18n（</a:t>
-            </a:r>
-            <a:r>
-              <a:rPr lang="zh-CN" altLang="en-US" sz="1200">
-                <a:solidFill>
-                  <a:srgbClr val="FF0000"/>
-                </a:solidFill>
-              </a:rPr>
-              <a:t>提供中文文档等本地化内容），但 </a:t>
-            </a:r>
-            <a:r>
-              <a:rPr lang="en-US" altLang="zh-CN" sz="1200">
-                <a:solidFill>
-                  <a:srgbClr val="FF0000"/>
-                </a:solidFill>
-              </a:rPr>
-              <a:t>Karmada </a:t>
-            </a:r>
-            <a:r>
-              <a:rPr lang="zh-CN" altLang="en-US" sz="1200">
-                <a:solidFill>
-                  <a:srgbClr val="FF0000"/>
-                </a:solidFill>
-              </a:rPr>
-              <a:t>核心软件与 </a:t>
-            </a:r>
-            <a:r>
-              <a:rPr lang="en-US" altLang="zh-CN" sz="1200">
-                <a:solidFill>
-                  <a:srgbClr val="FF0000"/>
-                </a:solidFill>
-              </a:rPr>
-              <a:t>karmadactl </a:t>
-            </a:r>
-            <a:r>
-              <a:rPr lang="zh-CN" altLang="en-US" sz="1200">
-                <a:solidFill>
-                  <a:srgbClr val="FF0000"/>
-                </a:solidFill>
-              </a:rPr>
-              <a:t>面向用户的输出没有公开的 </a:t>
-            </a:r>
-            <a:r>
-              <a:rPr lang="en-US" altLang="zh-CN" sz="1200">
-                <a:solidFill>
-                  <a:srgbClr val="FF0000"/>
-                </a:solidFill>
-              </a:rPr>
-              <a:t>i18n/localization </a:t>
-            </a:r>
-            <a:r>
-              <a:rPr lang="zh-CN" altLang="en-US" sz="1200">
-                <a:solidFill>
-                  <a:srgbClr val="FF0000"/>
-                </a:solidFill>
-              </a:rPr>
-              <a:t>框架或资源目录，不能认定“软件 </a:t>
-            </a:r>
-            <a:r>
-              <a:rPr lang="en-US" altLang="zh-CN" sz="1200">
-                <a:solidFill>
-                  <a:srgbClr val="FF0000"/>
-                </a:solidFill>
-              </a:rPr>
-              <a:t>produced by the project </a:t>
-            </a:r>
-            <a:r>
-              <a:rPr lang="zh-CN" altLang="en-US" sz="1200">
-                <a:solidFill>
-                  <a:srgbClr val="FF0000"/>
-                </a:solidFill>
-              </a:rPr>
-              <a:t>已国际化”。</a:t>
-            </a:r>
-            <a:r>
-              <a:rPr lang="en-US" altLang="zh-CN" sz="1200">
-                <a:solidFill>
-                  <a:srgbClr val="FF0000"/>
-                </a:solidFill>
-              </a:rPr>
-              <a:t>https://github.com/karmada-io/karmada ; https://karmada.io/zh/docs/ [improvement]: </a:t>
-            </a:r>
-            <a:r>
-              <a:rPr lang="zh-CN" altLang="en-US" sz="1200">
-                <a:solidFill>
-                  <a:srgbClr val="FF0000"/>
-                </a:solidFill>
-              </a:rPr>
-              <a:t>为 </a:t>
-            </a:r>
-            <a:r>
-              <a:rPr lang="en-US" altLang="zh-CN" sz="1200">
-                <a:solidFill>
-                  <a:srgbClr val="FF0000"/>
-                </a:solidFill>
-              </a:rPr>
-              <a:t>karmadactl </a:t>
-            </a:r>
-            <a:r>
-              <a:rPr lang="zh-CN" altLang="en-US" sz="1200">
-                <a:solidFill>
-                  <a:srgbClr val="FF0000"/>
-                </a:solidFill>
-              </a:rPr>
-              <a:t>与核心面向用户输出建立系统化 </a:t>
-            </a:r>
-            <a:r>
-              <a:rPr lang="en-US" altLang="zh-CN" sz="1200">
-                <a:solidFill>
-                  <a:srgbClr val="FF0000"/>
-                </a:solidFill>
-              </a:rPr>
-              <a:t>i18n/</a:t>
-            </a:r>
-            <a:r>
-              <a:rPr lang="zh-CN" altLang="en-US" sz="1200">
-                <a:solidFill>
-                  <a:srgbClr val="FF0000"/>
-                </a:solidFill>
-              </a:rPr>
-              <a:t>本地化框架和资源目录，覆盖全部用户可见字符串并提供本地化入口。</a:t>
-            </a:r>
+                  <a:srgbClr val="00B0F0"/>
+                </a:solidFill>
+              </a:rPr>
+              <a:t>Met: </a:t>
+            </a:r>
+            <a:r>
+              <a:rPr lang="en-US" altLang="zh-CN" sz="1200">
+                <a:solidFill>
+                  <a:srgbClr val="00B0F0"/>
+                </a:solidFill>
+                <a:sym typeface="+mn-ea"/>
+              </a:rPr>
+              <a:t>https://github.com/karmada-io/karmada ; https://karmada.io/zh/docs/</a:t>
+            </a:r>
+            <a:r>
+              <a:rPr lang="en-US" altLang="zh-CN" sz="1200">
+                <a:solidFill>
+                  <a:srgbClr val="00B0F0"/>
+                </a:solidFill>
+              </a:rPr>
+              <a:t>	</a:t>
+            </a:r>
+            <a:endParaRPr lang="zh-CN" altLang="en-US" sz="1200">
+              <a:solidFill>
+                <a:srgbClr val="00B0F0"/>
+              </a:solidFill>
+            </a:endParaRPr>
+          </a:p>
+          <a:p>
+            <a:pPr marL="285750" indent="-285750">
+              <a:buFont typeface="Arial" panose="020B0604020202020204" pitchFamily="34" charset="0"/>
+              <a:buChar char="•"/>
+            </a:pPr>
             <a:endParaRPr lang="zh-CN" altLang="en-US" sz="1200">
               <a:solidFill>
                 <a:srgbClr val="FF0000"/>
@@ -12689,19 +12734,26 @@
             </a:pPr>
             <a:r>
               <a:rPr lang="en-US" altLang="zh-CN" sz="1200">
+                <a:solidFill>
+                  <a:srgbClr val="00B0F0"/>
+                </a:solidFill>
                 <a:sym typeface="+mn-ea"/>
               </a:rPr>
               <a:t>Must </a:t>
             </a:r>
             <a:r>
-              <a:rPr lang="zh-CN" altLang="en-US" sz="1200"/>
-              <a:t>类别：如果项目站点需要密码登录，没有</a:t>
-            </a:r>
-            <a:r>
-              <a:rPr lang="zh-CN" altLang="en-US" sz="1200"/>
-              <a:t>这个</a:t>
-            </a:r>
-            <a:endParaRPr lang="zh-CN" altLang="en-US" sz="1200"/>
+              <a:rPr lang="zh-CN" altLang="en-US" sz="1200">
+                <a:solidFill>
+                  <a:srgbClr val="00B0F0"/>
+                </a:solidFill>
+              </a:rPr>
+              <a:t>类别：如果项目站点需要密码登录，没有这个</a:t>
+            </a:r>
+            <a:endParaRPr lang="zh-CN" altLang="en-US" sz="1200">
+              <a:solidFill>
+                <a:srgbClr val="00B0F0"/>
+              </a:solidFill>
+            </a:endParaRPr>
           </a:p>
           <a:p>
             <a:pPr marL="285750" indent="-285750">
@@ -12711,7 +12763,7 @@
             <a:r>
               <a:rPr lang="en-US" altLang="zh-CN" sz="1200">
                 <a:solidFill>
-                  <a:srgbClr val="FF0000"/>
+                  <a:srgbClr val="00B0F0"/>
                 </a:solidFill>
                 <a:sym typeface="+mn-ea"/>
               </a:rPr>
@@ -12720,7 +12772,7 @@
             <a:r>
               <a:rPr lang="zh-CN" altLang="en-US" sz="1200">
                 <a:solidFill>
-                  <a:srgbClr val="FF0000"/>
+                  <a:srgbClr val="00B0F0"/>
                 </a:solidFill>
                 <a:sym typeface="+mn-ea"/>
               </a:rPr>
@@ -12729,7 +12781,7 @@
             <a:r>
               <a:rPr lang="en-US" altLang="zh-CN" sz="1200">
                 <a:solidFill>
-                  <a:srgbClr val="FF0000"/>
+                  <a:srgbClr val="00B0F0"/>
                 </a:solidFill>
                 <a:sym typeface="+mn-ea"/>
               </a:rPr>
@@ -12738,7 +12790,7 @@
             <a:r>
               <a:rPr lang="zh-CN" altLang="en-US" sz="1200">
                 <a:solidFill>
-                  <a:srgbClr val="FF0000"/>
+                  <a:srgbClr val="00B0F0"/>
                 </a:solidFill>
                 <a:sym typeface="+mn-ea"/>
               </a:rPr>
@@ -12747,7 +12799,7 @@
             <a:r>
               <a:rPr lang="en-US" altLang="zh-CN" sz="1200">
                 <a:solidFill>
-                  <a:srgbClr val="FF0000"/>
+                  <a:srgbClr val="00B0F0"/>
                 </a:solidFill>
                 <a:sym typeface="+mn-ea"/>
               </a:rPr>
@@ -12756,7 +12808,7 @@
             <a:r>
               <a:rPr lang="zh-CN" altLang="en-US" sz="1200">
                 <a:solidFill>
-                  <a:srgbClr val="FF0000"/>
+                  <a:srgbClr val="00B0F0"/>
                 </a:solidFill>
                 <a:sym typeface="+mn-ea"/>
               </a:rPr>
@@ -12765,7 +12817,7 @@
             <a:r>
               <a:rPr lang="en-US" altLang="zh-CN" sz="1200">
                 <a:solidFill>
-                  <a:srgbClr val="FF0000"/>
+                  <a:srgbClr val="00B0F0"/>
                 </a:solidFill>
                 <a:sym typeface="+mn-ea"/>
               </a:rPr>
@@ -12774,7 +12826,7 @@
             <a:r>
               <a:rPr lang="zh-CN" altLang="en-US" sz="1200">
                 <a:solidFill>
-                  <a:srgbClr val="FF0000"/>
+                  <a:srgbClr val="00B0F0"/>
                 </a:solidFill>
                 <a:sym typeface="+mn-ea"/>
               </a:rPr>
@@ -12783,7 +12835,7 @@
             <a:r>
               <a:rPr lang="en-US" altLang="zh-CN" sz="1200">
                 <a:solidFill>
-                  <a:srgbClr val="FF0000"/>
+                  <a:srgbClr val="00B0F0"/>
                 </a:solidFill>
                 <a:sym typeface="+mn-ea"/>
               </a:rPr>
@@ -12792,7 +12844,7 @@
             <a:r>
               <a:rPr lang="zh-CN" altLang="en-US" sz="1200">
                 <a:solidFill>
-                  <a:srgbClr val="FF0000"/>
+                  <a:srgbClr val="00B0F0"/>
                 </a:solidFill>
                 <a:sym typeface="+mn-ea"/>
               </a:rPr>
@@ -12801,7 +12853,7 @@
             <a:r>
               <a:rPr lang="en-US" altLang="zh-CN" sz="1200">
                 <a:solidFill>
-                  <a:srgbClr val="FF0000"/>
+                  <a:srgbClr val="00B0F0"/>
                 </a:solidFill>
                 <a:sym typeface="+mn-ea"/>
               </a:rPr>
@@ -12810,7 +12862,7 @@
             <a:r>
               <a:rPr lang="zh-CN" altLang="en-US" sz="1200">
                 <a:solidFill>
-                  <a:srgbClr val="FF0000"/>
+                  <a:srgbClr val="00B0F0"/>
                 </a:solidFill>
                 <a:sym typeface="+mn-ea"/>
               </a:rPr>
@@ -12819,7 +12871,7 @@
             <a:r>
               <a:rPr lang="en-US" altLang="zh-CN" sz="1200">
                 <a:solidFill>
-                  <a:srgbClr val="FF0000"/>
+                  <a:srgbClr val="00B0F0"/>
                 </a:solidFill>
                 <a:sym typeface="+mn-ea"/>
               </a:rPr>
@@ -12827,7 +12879,7 @@
             </a:r>
             <a:endParaRPr lang="en-US" altLang="zh-CN" sz="1200">
               <a:solidFill>
-                <a:srgbClr val="FF0000"/>
+                <a:srgbClr val="00B0F0"/>
               </a:solidFill>
               <a:sym typeface="+mn-ea"/>
             </a:endParaRPr>
@@ -12861,23 +12913,34 @@
             </a:pPr>
             <a:r>
               <a:rPr lang="en-US" altLang="zh-CN" sz="1200">
+                <a:solidFill>
+                  <a:srgbClr val="00B0F0"/>
+                </a:solidFill>
                 <a:sym typeface="+mn-ea"/>
               </a:rPr>
               <a:t>Should</a:t>
             </a:r>
             <a:r>
-              <a:rPr lang="zh-CN" altLang="en-US" sz="1200"/>
-              <a:t>类别：要求项目</a:t>
-            </a:r>
-            <a:r>
-              <a:rPr lang="zh-CN" altLang="en-US" sz="1200"/>
-              <a:t>维护多个版本，并且记录升级路径。</a:t>
-            </a:r>
-            <a:r>
-              <a:rPr lang="en-US" altLang="zh-CN" sz="1200"/>
+              <a:rPr lang="zh-CN" altLang="en-US" sz="1200">
+                <a:solidFill>
+                  <a:srgbClr val="00B0F0"/>
+                </a:solidFill>
+              </a:rPr>
+              <a:t>类别：要求项目维护多个版本，并且记录升级路径。</a:t>
+            </a:r>
+            <a:r>
+              <a:rPr lang="en-US" altLang="zh-CN" sz="1200">
+                <a:solidFill>
+                  <a:srgbClr val="00B0F0"/>
+                </a:solidFill>
+              </a:rPr>
               <a:t>		</a:t>
             </a:r>
-            <a:endParaRPr lang="zh-CN" altLang="en-US" sz="1200"/>
+            <a:endParaRPr lang="zh-CN" altLang="en-US" sz="1200">
+              <a:solidFill>
+                <a:srgbClr val="00B0F0"/>
+              </a:solidFill>
+            </a:endParaRPr>
           </a:p>
           <a:p>
             <a:pPr marL="285750" indent="-285750">
@@ -12887,7 +12950,7 @@
             <a:r>
               <a:rPr lang="en-US" altLang="zh-CN" sz="1200">
                 <a:solidFill>
-                  <a:srgbClr val="FF0000"/>
+                  <a:srgbClr val="00B0F0"/>
                 </a:solidFill>
               </a:rPr>
               <a:t>Met</a:t>
@@ -12895,7 +12958,7 @@
             <a:r>
               <a:rPr lang="zh-CN" altLang="en-US" sz="1200">
                 <a:solidFill>
-                  <a:srgbClr val="FF0000"/>
+                  <a:srgbClr val="00B0F0"/>
                 </a:solidFill>
               </a:rPr>
               <a:t>：</a:t>
@@ -12903,7 +12966,7 @@
             <a:r>
               <a:rPr lang="en-US" altLang="zh-CN" sz="1200">
                 <a:solidFill>
-                  <a:srgbClr val="FF0000"/>
+                  <a:srgbClr val="00B0F0"/>
                 </a:solidFill>
               </a:rPr>
               <a:t> SECURITY.md </a:t>
@@ -12911,7 +12974,7 @@
             <a:r>
               <a:rPr lang="zh-CN" altLang="en-US" sz="1200">
                 <a:solidFill>
-                  <a:srgbClr val="FF0000"/>
+                  <a:srgbClr val="00B0F0"/>
                 </a:solidFill>
               </a:rPr>
               <a:t>声明维护最近三个 </a:t>
@@ -12919,7 +12982,7 @@
             <a:r>
               <a:rPr lang="en-US" altLang="zh-CN" sz="1200">
                 <a:solidFill>
-                  <a:srgbClr val="FF0000"/>
+                  <a:srgbClr val="00B0F0"/>
                 </a:solidFill>
               </a:rPr>
               <a:t>minor release </a:t>
@@ -12927,7 +12990,7 @@
             <a:r>
               <a:rPr lang="zh-CN" altLang="en-US" sz="1200">
                 <a:solidFill>
-                  <a:srgbClr val="FF0000"/>
+                  <a:srgbClr val="00B0F0"/>
                 </a:solidFill>
               </a:rPr>
               <a:t>分支并回移适用修复；官网提供 </a:t>
@@ -12935,7 +12998,7 @@
             <a:r>
               <a:rPr lang="en-US" altLang="zh-CN" sz="1200">
                 <a:solidFill>
-                  <a:srgbClr val="FF0000"/>
+                  <a:srgbClr val="00B0F0"/>
                 </a:solidFill>
               </a:rPr>
               <a:t>Helm/Operator </a:t>
@@ -12943,7 +13006,7 @@
             <a:r>
               <a:rPr lang="zh-CN" altLang="en-US" sz="1200">
                 <a:solidFill>
-                  <a:srgbClr val="FF0000"/>
+                  <a:srgbClr val="00B0F0"/>
                 </a:solidFill>
               </a:rPr>
               <a:t>升级路径与详细升级文档（含 </a:t>
@@ -12951,7 +13014,7 @@
             <a:r>
               <a:rPr lang="en-US" altLang="zh-CN" sz="1200">
                 <a:solidFill>
-                  <a:srgbClr val="FF0000"/>
+                  <a:srgbClr val="00B0F0"/>
                 </a:solidFill>
               </a:rPr>
               <a:t>API </a:t>
@@ -12959,7 +13022,7 @@
             <a:r>
               <a:rPr lang="zh-CN" altLang="en-US" sz="1200">
                 <a:solidFill>
-                  <a:srgbClr val="FF0000"/>
+                  <a:srgbClr val="00B0F0"/>
                 </a:solidFill>
               </a:rPr>
               <a:t>与组件升级步骤）。</a:t>
@@ -12967,14 +13030,14 @@
             <a:r>
               <a:rPr lang="en-US" altLang="zh-CN" sz="1200">
                 <a:solidFill>
-                  <a:srgbClr val="FF0000"/>
+                  <a:srgbClr val="00B0F0"/>
                 </a:solidFill>
               </a:rPr>
               <a:t>https://github.com/karmada-io/community/blob/main/security-team/SECURITY.md ; https://karmada.io/docs/administrator/upgrading/</a:t>
             </a:r>
             <a:endParaRPr lang="en-US" altLang="zh-CN" sz="1200">
               <a:solidFill>
-                <a:srgbClr val="FF0000"/>
+                <a:srgbClr val="00B0F0"/>
               </a:solidFill>
             </a:endParaRPr>
           </a:p>
